--- a/document/scss/prezentare_scss.pptx
+++ b/document/scss/prezentare_scss.pptx
@@ -5,7 +5,7 @@
     <p:sldMasterId id="2147483648" r:id="rId1"/>
   </p:sldMasterIdLst>
   <p:notesMasterIdLst>
-    <p:notesMasterId r:id="rId12"/>
+    <p:notesMasterId r:id="rId13"/>
   </p:notesMasterIdLst>
   <p:sldIdLst>
     <p:sldId id="256" r:id="rId4"/>
@@ -16,6 +16,7 @@
     <p:sldId id="261" r:id="rId9"/>
     <p:sldId id="262" r:id="rId10"/>
     <p:sldId id="263" r:id="rId11"/>
+    <p:sldId id="264" r:id="rId12"/>
   </p:sldIdLst>
   <p:sldSz cx="12192000" cy="6858000"/>
   <p:notesSz cx="6858000" cy="9144000"/>
@@ -141,7 +142,7 @@
       </p:grpSpPr>
       <p:sp>
         <p:nvSpPr>
-          <p:cNvPr id="379127086" name="Header Placeholder 1"/>
+          <p:cNvPr id="911245980" name="Header Placeholder 1"/>
           <p:cNvSpPr>
             <a:spLocks noGrp="1"/>
           </p:cNvSpPr>
@@ -175,7 +176,7 @@
       </p:sp>
       <p:sp>
         <p:nvSpPr>
-          <p:cNvPr id="550417191" name="Date Placeholder 2"/>
+          <p:cNvPr id="1347900334" name="Date Placeholder 2"/>
           <p:cNvSpPr>
             <a:spLocks noGrp="1"/>
           </p:cNvSpPr>
@@ -213,7 +214,7 @@
       </p:sp>
       <p:sp>
         <p:nvSpPr>
-          <p:cNvPr id="1669960567" name="Slide Image Placeholder 3"/>
+          <p:cNvPr id="1397738013" name="Slide Image Placeholder 3"/>
           <p:cNvSpPr>
             <a:spLocks noChangeAspect="1" noGrp="1" noRot="1"/>
           </p:cNvSpPr>
@@ -249,7 +250,7 @@
       </p:sp>
       <p:sp>
         <p:nvSpPr>
-          <p:cNvPr id="472025022" name="Notes Placeholder 4"/>
+          <p:cNvPr id="346945103" name="Notes Placeholder 4"/>
           <p:cNvSpPr>
             <a:spLocks noGrp="1"/>
           </p:cNvSpPr>
@@ -323,7 +324,7 @@
       </p:sp>
       <p:sp>
         <p:nvSpPr>
-          <p:cNvPr id="1513584976" name="Footer Placeholder 5"/>
+          <p:cNvPr id="1289343937" name="Footer Placeholder 5"/>
           <p:cNvSpPr>
             <a:spLocks noGrp="1"/>
           </p:cNvSpPr>
@@ -357,7 +358,7 @@
       </p:sp>
       <p:sp>
         <p:nvSpPr>
-          <p:cNvPr id="1464022107" name="Slide Number Placeholder 6"/>
+          <p:cNvPr id="1009808305" name="Slide Number Placeholder 6"/>
           <p:cNvSpPr>
             <a:spLocks noGrp="1"/>
           </p:cNvSpPr>
@@ -510,7 +511,7 @@
       </p:grpSpPr>
       <p:sp>
         <p:nvSpPr>
-          <p:cNvPr id="2118831480" name="Slide Image Placeholder 1"/>
+          <p:cNvPr id="1173113336" name="Slide Image Placeholder 1"/>
           <p:cNvSpPr>
             <a:spLocks noChangeAspect="1" noGrp="1" noRot="1"/>
           </p:cNvSpPr>
@@ -527,7 +528,7 @@
       </p:sp>
       <p:sp>
         <p:nvSpPr>
-          <p:cNvPr id="1287383210" name="Notes Placeholder 2"/>
+          <p:cNvPr id="1182808605" name="Notes Placeholder 2"/>
           <p:cNvSpPr>
             <a:spLocks noGrp="1"/>
           </p:cNvSpPr>
@@ -566,7 +567,7 @@
       </p:sp>
       <p:sp>
         <p:nvSpPr>
-          <p:cNvPr id="1202758028" name="Slide Number Placeholder 3"/>
+          <p:cNvPr id="728324947" name="Slide Number Placeholder 3"/>
           <p:cNvSpPr>
             <a:spLocks noGrp="1"/>
           </p:cNvSpPr>
@@ -617,7 +618,7 @@
       </p:grpSpPr>
       <p:sp>
         <p:nvSpPr>
-          <p:cNvPr id="661526422" name="Slide Image Placeholder 1"/>
+          <p:cNvPr id="218066173" name="Slide Image Placeholder 1"/>
           <p:cNvSpPr>
             <a:spLocks noChangeAspect="1" noGrp="1" noRot="1"/>
           </p:cNvSpPr>
@@ -629,7 +630,7 @@
       </p:sp>
       <p:sp>
         <p:nvSpPr>
-          <p:cNvPr id="1266364710" name="Notes Placeholder 2"/>
+          <p:cNvPr id="1237489402" name="Notes Placeholder 2"/>
           <p:cNvSpPr>
             <a:spLocks noGrp="1"/>
           </p:cNvSpPr>
@@ -685,7 +686,7 @@
       </p:sp>
       <p:sp>
         <p:nvSpPr>
-          <p:cNvPr id="986739890" name="Slide Number Placeholder 3"/>
+          <p:cNvPr id="997795407" name="Slide Number Placeholder 3"/>
           <p:cNvSpPr>
             <a:spLocks noGrp="1"/>
           </p:cNvSpPr>
@@ -736,7 +737,7 @@
       </p:grpSpPr>
       <p:sp>
         <p:nvSpPr>
-          <p:cNvPr id="504195063" name="Slide Image Placeholder 1"/>
+          <p:cNvPr id="669906215" name="Slide Image Placeholder 1"/>
           <p:cNvSpPr>
             <a:spLocks noChangeAspect="1" noGrp="1" noRot="1"/>
           </p:cNvSpPr>
@@ -748,7 +749,7 @@
       </p:sp>
       <p:sp>
         <p:nvSpPr>
-          <p:cNvPr id="2054589432" name="Notes Placeholder 2"/>
+          <p:cNvPr id="565453019" name="Notes Placeholder 2"/>
           <p:cNvSpPr>
             <a:spLocks noGrp="1"/>
           </p:cNvSpPr>
@@ -791,7 +792,7 @@
       </p:sp>
       <p:sp>
         <p:nvSpPr>
-          <p:cNvPr id="654573432" name="Slide Number Placeholder 3"/>
+          <p:cNvPr id="142246254" name="Slide Number Placeholder 3"/>
           <p:cNvSpPr>
             <a:spLocks noGrp="1"/>
           </p:cNvSpPr>
@@ -842,7 +843,7 @@
       </p:grpSpPr>
       <p:sp>
         <p:nvSpPr>
-          <p:cNvPr id="1898464931" name="Slide Image Placeholder 1"/>
+          <p:cNvPr id="350565405" name="Slide Image Placeholder 1"/>
           <p:cNvSpPr>
             <a:spLocks noChangeAspect="1" noGrp="1" noRot="1"/>
           </p:cNvSpPr>
@@ -854,7 +855,7 @@
       </p:sp>
       <p:sp>
         <p:nvSpPr>
-          <p:cNvPr id="363911385" name="Notes Placeholder 2"/>
+          <p:cNvPr id="467960908" name="Notes Placeholder 2"/>
           <p:cNvSpPr>
             <a:spLocks noGrp="1"/>
           </p:cNvSpPr>
@@ -880,7 +881,7 @@
       </p:sp>
       <p:sp>
         <p:nvSpPr>
-          <p:cNvPr id="1729132587" name="Slide Number Placeholder 3"/>
+          <p:cNvPr id="2074235863" name="Slide Number Placeholder 3"/>
           <p:cNvSpPr>
             <a:spLocks noGrp="1"/>
           </p:cNvSpPr>
@@ -931,7 +932,7 @@
       </p:grpSpPr>
       <p:sp>
         <p:nvSpPr>
-          <p:cNvPr id="1342614179" name="Slide Image Placeholder 1"/>
+          <p:cNvPr id="2" name="Slide Image Placeholder 1"/>
           <p:cNvSpPr>
             <a:spLocks noChangeAspect="1" noGrp="1" noRot="1"/>
           </p:cNvSpPr>
@@ -943,7 +944,7 @@
       </p:sp>
       <p:sp>
         <p:nvSpPr>
-          <p:cNvPr id="1350893811" name="Notes Placeholder 2"/>
+          <p:cNvPr id="3" name="Notes Placeholder 2"/>
           <p:cNvSpPr>
             <a:spLocks noGrp="1"/>
           </p:cNvSpPr>
@@ -959,57 +960,13 @@
             <a:pPr>
               <a:defRPr/>
             </a:pPr>
-            <a:r>
-              <a:rPr lang="en-US" sz="2200"/>
-              <a:t>Ca si elemente principale, aplicatia este formata din 4 componente</a:t>
-            </a:r>
-            <a:endParaRPr lang="en-US" sz="2200"/>
-          </a:p>
-          <a:p>
-            <a:pPr>
-              <a:defRPr/>
-            </a:pPr>
-            <a:r>
-              <a:rPr lang="en-US" sz="2200"/>
-              <a:t>O componenta de filtrare, ce reprezinta un modul kernel</a:t>
-            </a:r>
-            <a:endParaRPr lang="en-US" sz="2200"/>
-          </a:p>
-          <a:p>
-            <a:pPr>
-              <a:defRPr/>
-            </a:pPr>
-            <a:r>
-              <a:rPr lang="en-US" sz="2200"/>
-              <a:t>O componenta de intermediere, reprezentanta de un daemon</a:t>
-            </a:r>
-            <a:endParaRPr lang="en-US" sz="2200"/>
-          </a:p>
-          <a:p>
-            <a:pPr>
-              <a:defRPr/>
-            </a:pPr>
-            <a:r>
-              <a:rPr lang="en-US" sz="2200"/>
-              <a:t>Componenta centrala, serverul aplicatiei</a:t>
-            </a:r>
-            <a:endParaRPr lang="en-US" sz="2200"/>
-          </a:p>
-          <a:p>
-            <a:pPr>
-              <a:defRPr/>
-            </a:pPr>
-            <a:r>
-              <a:rPr lang="en-US" sz="2200"/>
-              <a:t>Si componenta de administrare, anume aplicatia desktop</a:t>
-            </a:r>
-            <a:endParaRPr lang="en-US" sz="2200"/>
-          </a:p>
-        </p:txBody>
-      </p:sp>
-      <p:sp>
-        <p:nvSpPr>
-          <p:cNvPr id="806328601" name="Slide Number Placeholder 3"/>
+            <a:endParaRPr/>
+          </a:p>
+        </p:txBody>
+      </p:sp>
+      <p:sp>
+        <p:nvSpPr>
+          <p:cNvPr id="4" name="Slide Number Placeholder 3"/>
           <p:cNvSpPr>
             <a:spLocks noGrp="1"/>
           </p:cNvSpPr>
@@ -1025,7 +982,7 @@
             <a:pPr>
               <a:defRPr/>
             </a:pPr>
-            <a:fld id="{E4EE69F8-FDD7-414C-8AAD-B3F0FDCA0F12}" type="slidenum">
+            <a:fld id="{55E03AB8-7D1C-C7A9-514B-8B896099F481}" type="slidenum">
               <a:rPr/>
               <a:t/>
             </a:fld>
@@ -1060,7 +1017,7 @@
       </p:grpSpPr>
       <p:sp>
         <p:nvSpPr>
-          <p:cNvPr id="753039683" name="Slide Image Placeholder 1"/>
+          <p:cNvPr id="2045548889" name="Slide Image Placeholder 1"/>
           <p:cNvSpPr>
             <a:spLocks noChangeAspect="1" noGrp="1" noRot="1"/>
           </p:cNvSpPr>
@@ -1072,7 +1029,7 @@
       </p:sp>
       <p:sp>
         <p:nvSpPr>
-          <p:cNvPr id="10884351" name="Notes Placeholder 2"/>
+          <p:cNvPr id="510370496" name="Notes Placeholder 2"/>
           <p:cNvSpPr>
             <a:spLocks noGrp="1"/>
           </p:cNvSpPr>
@@ -1089,195 +1046,56 @@
               <a:defRPr/>
             </a:pPr>
             <a:r>
-              <a:rPr lang="en-US" sz="1800" b="0" i="0" u="none" strike="noStrike" cap="none" spc="0">
-                <a:solidFill>
-                  <a:schemeClr val="tx1"/>
-                </a:solidFill>
-                <a:latin typeface="+mn-lt"/>
-                <a:ea typeface="+mn-ea"/>
-                <a:cs typeface="+mn-cs"/>
-              </a:rPr>
-              <a:t>Aplicatia poate functiona in 4 moduri:</a:t>
-            </a:r>
-            <a:endParaRPr lang="en-US" sz="1800" b="0" i="0" u="none" strike="noStrike" cap="none" spc="0">
-              <a:solidFill>
-                <a:schemeClr val="tx1"/>
-              </a:solidFill>
-              <a:latin typeface="Times New Roman"/>
-              <a:cs typeface="Times New Roman"/>
-            </a:endParaRPr>
-          </a:p>
-          <a:p>
-            <a:pPr>
-              <a:defRPr/>
-            </a:pPr>
-            <a:r>
-              <a:rPr lang="en-US" sz="1800" b="0" i="0" u="none" strike="noStrike" cap="none" spc="0">
-                <a:solidFill>
-                  <a:schemeClr val="tx1"/>
-                </a:solidFill>
-                <a:latin typeface="Arial"/>
-                <a:ea typeface="Arial"/>
-                <a:cs typeface="Arial"/>
-              </a:rPr>
-              <a:t>Permisiv, in care raporteaza conexiunile nepermise, dar nu le blocheaza</a:t>
-            </a:r>
-            <a:endParaRPr lang="en-US" sz="1800" b="0" i="0" u="none" strike="noStrike" cap="none" spc="0">
-              <a:solidFill>
-                <a:schemeClr val="tx1"/>
-              </a:solidFill>
-              <a:latin typeface="Times New Roman"/>
-              <a:cs typeface="Times New Roman"/>
-            </a:endParaRPr>
-          </a:p>
-          <a:p>
-            <a:pPr>
-              <a:defRPr/>
-            </a:pPr>
-            <a:r>
-              <a:rPr lang="en-US" sz="1800" b="0" i="0" u="none" strike="noStrike" cap="none" spc="0">
-                <a:solidFill>
-                  <a:schemeClr val="tx1"/>
-                </a:solidFill>
-                <a:latin typeface="Arial"/>
-                <a:ea typeface="Arial"/>
-                <a:cs typeface="Arial"/>
-              </a:rPr>
-              <a:t>Reactiv, in care raporteaza si blocheaza traficul nepermis</a:t>
-            </a:r>
-            <a:endParaRPr lang="en-US" sz="1800" b="0" i="0" u="none" strike="noStrike" cap="none" spc="0">
-              <a:solidFill>
-                <a:schemeClr val="tx1"/>
-              </a:solidFill>
-              <a:latin typeface="Times New Roman"/>
-              <a:cs typeface="Times New Roman"/>
-            </a:endParaRPr>
-          </a:p>
-          <a:p>
-            <a:pPr>
-              <a:defRPr/>
-            </a:pPr>
-            <a:r>
-              <a:rPr lang="en-US" sz="1800" b="0" i="0" u="none" strike="noStrike" cap="none" spc="0">
-                <a:solidFill>
-                  <a:schemeClr val="tx1"/>
-                </a:solidFill>
-                <a:latin typeface="Arial"/>
-                <a:ea typeface="Arial"/>
-                <a:cs typeface="Arial"/>
-              </a:rPr>
-              <a:t>Dezactivat, in care nu raporteaza si nu blocheaza</a:t>
-            </a:r>
-            <a:endParaRPr lang="en-US" sz="1800" b="0" i="0" u="none" strike="noStrike" cap="none" spc="0">
-              <a:solidFill>
-                <a:schemeClr val="tx1"/>
-              </a:solidFill>
-              <a:latin typeface="Times New Roman"/>
-              <a:cs typeface="Times New Roman"/>
-            </a:endParaRPr>
-          </a:p>
-          <a:p>
-            <a:pPr>
-              <a:defRPr/>
-            </a:pPr>
-            <a:r>
-              <a:rPr lang="en-US" sz="1800" b="0" i="0" u="none" strike="noStrike" cap="none" spc="0">
-                <a:solidFill>
-                  <a:schemeClr val="tx1"/>
-                </a:solidFill>
-                <a:latin typeface="Arial"/>
-                <a:ea typeface="Arial"/>
-                <a:cs typeface="Arial"/>
-              </a:rPr>
-              <a:t>Si modul de antrenare, mod folosit pentru definire a traficului permis, in care toate conexiunile care au fost inregistrate sunt adaugate automat in lista de conexiuni permise</a:t>
-            </a:r>
-            <a:endParaRPr lang="en-US" sz="1800" b="0" i="0" u="none" strike="noStrike" cap="none" spc="0">
-              <a:solidFill>
-                <a:schemeClr val="tx1"/>
-              </a:solidFill>
-              <a:latin typeface="Times New Roman"/>
-              <a:cs typeface="Times New Roman"/>
-            </a:endParaRPr>
-          </a:p>
-          <a:p>
-            <a:pPr>
-              <a:defRPr/>
-            </a:pPr>
-            <a:endParaRPr lang="en-US" sz="1800" b="0" i="0" u="none" strike="noStrike" cap="none" spc="0">
-              <a:solidFill>
-                <a:schemeClr val="tx1"/>
-              </a:solidFill>
-              <a:latin typeface="Times New Roman"/>
-              <a:cs typeface="Times New Roman"/>
-            </a:endParaRPr>
-          </a:p>
-          <a:p>
-            <a:pPr>
-              <a:defRPr/>
-            </a:pPr>
-            <a:r>
-              <a:rPr lang="en-US" sz="1800" b="0" i="0" u="none" strike="noStrike" cap="none" spc="0">
-                <a:solidFill>
-                  <a:schemeClr val="tx1"/>
-                </a:solidFill>
-                <a:latin typeface="+mn-lt"/>
-                <a:ea typeface="+mn-ea"/>
-                <a:cs typeface="+mn-cs"/>
-              </a:rPr>
-              <a:t>Deci modulul kernel, care face filtrarea pe baza regulilor de trafic, stocate local pentru acces rapid</a:t>
-            </a:r>
-            <a:r>
-              <a:rPr lang="en-US" sz="1800" b="0" i="0" u="none" strike="noStrike" cap="none" spc="0">
-                <a:solidFill>
-                  <a:schemeClr val="tx1"/>
-                </a:solidFill>
-                <a:latin typeface="+mn-lt"/>
-                <a:ea typeface="+mn-ea"/>
-                <a:cs typeface="+mn-cs"/>
-              </a:rPr>
-              <a:t>.</a:t>
-            </a:r>
-            <a:endParaRPr sz="1800"/>
-          </a:p>
-          <a:p>
-            <a:pPr>
-              <a:defRPr/>
-            </a:pPr>
-            <a:r>
-              <a:rPr lang="en-US" sz="1800" b="0" i="0" u="none" strike="noStrike" cap="none" spc="0">
-                <a:solidFill>
-                  <a:schemeClr val="tx1"/>
-                </a:solidFill>
-                <a:latin typeface="+mn-lt"/>
-                <a:ea typeface="+mn-ea"/>
-                <a:cs typeface="+mn-cs"/>
-              </a:rPr>
-              <a:t>Intre modulul kernel si restul sistemului se afla un daemon de intermediere, care sincronizeaza regulile si transmite informatiile despre pachete catre server.</a:t>
-            </a:r>
-            <a:endParaRPr sz="1800"/>
-          </a:p>
-          <a:p>
-            <a:pPr>
-              <a:defRPr/>
-            </a:pPr>
-            <a:r>
-              <a:rPr lang="en-US" sz="1800" b="0" i="0" u="none" strike="noStrike" cap="none" spc="0">
-                <a:solidFill>
-                  <a:schemeClr val="tx1"/>
-                </a:solidFill>
-                <a:latin typeface="+mn-lt"/>
-                <a:ea typeface="+mn-ea"/>
-                <a:cs typeface="+mn-cs"/>
-              </a:rPr>
-              <a:t>componenta centrala, serverul, care colecteaza informatii de la toate dispozitivele, face o scurta prelucrare a lor si trimite informatiile componentei de administrare, din care se poate vizualizarea si modifica configurarea dispozitivelor.</a:t>
-            </a:r>
-            <a:endParaRPr sz="1800"/>
-          </a:p>
-        </p:txBody>
-      </p:sp>
-      <p:sp>
-        <p:nvSpPr>
-          <p:cNvPr id="1214800622" name="Slide Number Placeholder 3"/>
+              <a:rPr lang="en-US" sz="2200"/>
+              <a:t>Ca si elemente principale, aplicatia este formata din 4 componente</a:t>
+            </a:r>
+            <a:endParaRPr lang="en-US" sz="2200"/>
+          </a:p>
+          <a:p>
+            <a:pPr>
+              <a:defRPr/>
+            </a:pPr>
+            <a:r>
+              <a:rPr lang="en-US" sz="2200"/>
+              <a:t>O componenta de filtrare, ce reprezinta un modul kernel</a:t>
+            </a:r>
+            <a:endParaRPr lang="en-US" sz="2200"/>
+          </a:p>
+          <a:p>
+            <a:pPr>
+              <a:defRPr/>
+            </a:pPr>
+            <a:r>
+              <a:rPr lang="en-US" sz="2200"/>
+              <a:t>O componenta de intermediere, reprezentanta de un daemon</a:t>
+            </a:r>
+            <a:endParaRPr lang="en-US" sz="2200"/>
+          </a:p>
+          <a:p>
+            <a:pPr>
+              <a:defRPr/>
+            </a:pPr>
+            <a:r>
+              <a:rPr lang="en-US" sz="2200"/>
+              <a:t>Componenta centrala, serverul aplicatiei</a:t>
+            </a:r>
+            <a:endParaRPr lang="en-US" sz="2200"/>
+          </a:p>
+          <a:p>
+            <a:pPr>
+              <a:defRPr/>
+            </a:pPr>
+            <a:r>
+              <a:rPr lang="en-US" sz="2200"/>
+              <a:t>Si componenta de administrare, anume aplicatia desktop</a:t>
+            </a:r>
+            <a:endParaRPr lang="en-US" sz="2200"/>
+          </a:p>
+        </p:txBody>
+      </p:sp>
+      <p:sp>
+        <p:nvSpPr>
+          <p:cNvPr id="888779078" name="Slide Number Placeholder 3"/>
           <p:cNvSpPr>
             <a:spLocks noGrp="1"/>
           </p:cNvSpPr>
@@ -1293,7 +1111,7 @@
             <a:pPr>
               <a:defRPr/>
             </a:pPr>
-            <a:fld id="{632FB11F-0E1C-5F73-2BA6-164FF5FF0533}" type="slidenum">
+            <a:fld id="{E4EE69F8-FDD7-414C-8AAD-B3F0FDCA0F12}" type="slidenum">
               <a:rPr/>
               <a:t/>
             </a:fld>
@@ -1328,7 +1146,7 @@
       </p:grpSpPr>
       <p:sp>
         <p:nvSpPr>
-          <p:cNvPr id="491924599" name="Slide Image Placeholder 1"/>
+          <p:cNvPr id="638214813" name="Slide Image Placeholder 1"/>
           <p:cNvSpPr>
             <a:spLocks noChangeAspect="1" noGrp="1" noRot="1"/>
           </p:cNvSpPr>
@@ -1340,7 +1158,7 @@
       </p:sp>
       <p:sp>
         <p:nvSpPr>
-          <p:cNvPr id="1195736864" name="Notes Placeholder 2"/>
+          <p:cNvPr id="522041131" name="Notes Placeholder 2"/>
           <p:cNvSpPr>
             <a:spLocks noGrp="1"/>
           </p:cNvSpPr>
@@ -1356,13 +1174,196 @@
             <a:pPr>
               <a:defRPr/>
             </a:pPr>
-            <a:endParaRPr/>
-          </a:p>
-        </p:txBody>
-      </p:sp>
-      <p:sp>
-        <p:nvSpPr>
-          <p:cNvPr id="1221799108" name="Slide Number Placeholder 3"/>
+            <a:r>
+              <a:rPr lang="en-US" sz="1800" b="0" i="0" u="none" strike="noStrike" cap="none" spc="0">
+                <a:solidFill>
+                  <a:schemeClr val="tx1"/>
+                </a:solidFill>
+                <a:latin typeface="+mn-lt"/>
+                <a:ea typeface="+mn-ea"/>
+                <a:cs typeface="+mn-cs"/>
+              </a:rPr>
+              <a:t>Aplicatia poate functiona in 4 moduri:</a:t>
+            </a:r>
+            <a:endParaRPr lang="en-US" sz="1800" b="0" i="0" u="none" strike="noStrike" cap="none" spc="0">
+              <a:solidFill>
+                <a:schemeClr val="tx1"/>
+              </a:solidFill>
+              <a:latin typeface="Times New Roman"/>
+              <a:cs typeface="Times New Roman"/>
+            </a:endParaRPr>
+          </a:p>
+          <a:p>
+            <a:pPr>
+              <a:defRPr/>
+            </a:pPr>
+            <a:r>
+              <a:rPr lang="en-US" sz="1800" b="0" i="0" u="none" strike="noStrike" cap="none" spc="0">
+                <a:solidFill>
+                  <a:schemeClr val="tx1"/>
+                </a:solidFill>
+                <a:latin typeface="Arial"/>
+                <a:ea typeface="Arial"/>
+                <a:cs typeface="Arial"/>
+              </a:rPr>
+              <a:t>Permisiv, in care raporteaza conexiunile nepermise, dar nu le blocheaza</a:t>
+            </a:r>
+            <a:endParaRPr lang="en-US" sz="1800" b="0" i="0" u="none" strike="noStrike" cap="none" spc="0">
+              <a:solidFill>
+                <a:schemeClr val="tx1"/>
+              </a:solidFill>
+              <a:latin typeface="Times New Roman"/>
+              <a:cs typeface="Times New Roman"/>
+            </a:endParaRPr>
+          </a:p>
+          <a:p>
+            <a:pPr>
+              <a:defRPr/>
+            </a:pPr>
+            <a:r>
+              <a:rPr lang="en-US" sz="1800" b="0" i="0" u="none" strike="noStrike" cap="none" spc="0">
+                <a:solidFill>
+                  <a:schemeClr val="tx1"/>
+                </a:solidFill>
+                <a:latin typeface="Arial"/>
+                <a:ea typeface="Arial"/>
+                <a:cs typeface="Arial"/>
+              </a:rPr>
+              <a:t>Reactiv, in care raporteaza si blocheaza traficul nepermis</a:t>
+            </a:r>
+            <a:endParaRPr lang="en-US" sz="1800" b="0" i="0" u="none" strike="noStrike" cap="none" spc="0">
+              <a:solidFill>
+                <a:schemeClr val="tx1"/>
+              </a:solidFill>
+              <a:latin typeface="Times New Roman"/>
+              <a:cs typeface="Times New Roman"/>
+            </a:endParaRPr>
+          </a:p>
+          <a:p>
+            <a:pPr>
+              <a:defRPr/>
+            </a:pPr>
+            <a:r>
+              <a:rPr lang="en-US" sz="1800" b="0" i="0" u="none" strike="noStrike" cap="none" spc="0">
+                <a:solidFill>
+                  <a:schemeClr val="tx1"/>
+                </a:solidFill>
+                <a:latin typeface="Arial"/>
+                <a:ea typeface="Arial"/>
+                <a:cs typeface="Arial"/>
+              </a:rPr>
+              <a:t>Dezactivat, in care nu raporteaza si nu blocheaza</a:t>
+            </a:r>
+            <a:endParaRPr lang="en-US" sz="1800" b="0" i="0" u="none" strike="noStrike" cap="none" spc="0">
+              <a:solidFill>
+                <a:schemeClr val="tx1"/>
+              </a:solidFill>
+              <a:latin typeface="Times New Roman"/>
+              <a:cs typeface="Times New Roman"/>
+            </a:endParaRPr>
+          </a:p>
+          <a:p>
+            <a:pPr>
+              <a:defRPr/>
+            </a:pPr>
+            <a:r>
+              <a:rPr lang="en-US" sz="1800" b="0" i="0" u="none" strike="noStrike" cap="none" spc="0">
+                <a:solidFill>
+                  <a:schemeClr val="tx1"/>
+                </a:solidFill>
+                <a:latin typeface="Arial"/>
+                <a:ea typeface="Arial"/>
+                <a:cs typeface="Arial"/>
+              </a:rPr>
+              <a:t>Si modul de antrenare, mod folosit pentru definire a traficului permis, in care toate conexiunile care au fost inregistrate sunt adaugate automat in lista de conexiuni permise</a:t>
+            </a:r>
+            <a:endParaRPr lang="en-US" sz="1800" b="0" i="0" u="none" strike="noStrike" cap="none" spc="0">
+              <a:solidFill>
+                <a:schemeClr val="tx1"/>
+              </a:solidFill>
+              <a:latin typeface="Times New Roman"/>
+              <a:cs typeface="Times New Roman"/>
+            </a:endParaRPr>
+          </a:p>
+          <a:p>
+            <a:pPr>
+              <a:defRPr/>
+            </a:pPr>
+            <a:endParaRPr lang="en-US" sz="1800" b="0" i="0" u="none" strike="noStrike" cap="none" spc="0">
+              <a:solidFill>
+                <a:schemeClr val="tx1"/>
+              </a:solidFill>
+              <a:latin typeface="Times New Roman"/>
+              <a:cs typeface="Times New Roman"/>
+            </a:endParaRPr>
+          </a:p>
+          <a:p>
+            <a:pPr>
+              <a:defRPr/>
+            </a:pPr>
+            <a:r>
+              <a:rPr lang="en-US" sz="1800" b="0" i="0" u="none" strike="noStrike" cap="none" spc="0">
+                <a:solidFill>
+                  <a:schemeClr val="tx1"/>
+                </a:solidFill>
+                <a:latin typeface="+mn-lt"/>
+                <a:ea typeface="+mn-ea"/>
+                <a:cs typeface="+mn-cs"/>
+              </a:rPr>
+              <a:t>Deci modulul kernel, care face filtrarea pe baza regulilor de trafic, stocate local pentru acces rapid</a:t>
+            </a:r>
+            <a:r>
+              <a:rPr lang="en-US" sz="1800" b="0" i="0" u="none" strike="noStrike" cap="none" spc="0">
+                <a:solidFill>
+                  <a:schemeClr val="tx1"/>
+                </a:solidFill>
+                <a:latin typeface="+mn-lt"/>
+                <a:ea typeface="+mn-ea"/>
+                <a:cs typeface="+mn-cs"/>
+              </a:rPr>
+              <a:t>.</a:t>
+            </a:r>
+            <a:endParaRPr sz="1800"/>
+          </a:p>
+          <a:p>
+            <a:pPr>
+              <a:defRPr/>
+            </a:pPr>
+            <a:r>
+              <a:rPr lang="en-US" sz="1800" b="0" i="0" u="none" strike="noStrike" cap="none" spc="0">
+                <a:solidFill>
+                  <a:schemeClr val="tx1"/>
+                </a:solidFill>
+                <a:latin typeface="+mn-lt"/>
+                <a:ea typeface="+mn-ea"/>
+                <a:cs typeface="+mn-cs"/>
+              </a:rPr>
+              <a:t>Intre modulul kernel si restul sistemului se afla un daemon de intermediere, care sincronizeaza regulile si transmite informatiile despre pachete catre server.</a:t>
+            </a:r>
+            <a:endParaRPr sz="1800"/>
+          </a:p>
+          <a:p>
+            <a:pPr>
+              <a:defRPr/>
+            </a:pPr>
+            <a:r>
+              <a:rPr lang="en-US" sz="1800" b="0" i="0" u="none" strike="noStrike" cap="none" spc="0">
+                <a:solidFill>
+                  <a:schemeClr val="tx1"/>
+                </a:solidFill>
+                <a:latin typeface="+mn-lt"/>
+                <a:ea typeface="+mn-ea"/>
+                <a:cs typeface="+mn-cs"/>
+              </a:rPr>
+              <a:t>componenta centrala, serverul, care colecteaza informatii de la toate dispozitivele, face o scurta prelucrare a lor si trimite informatiile componentei de administrare, din care se poate vizualizarea si modifica configurarea dispozitivelor.</a:t>
+            </a:r>
+            <a:endParaRPr sz="1800"/>
+          </a:p>
+        </p:txBody>
+      </p:sp>
+      <p:sp>
+        <p:nvSpPr>
+          <p:cNvPr id="102572291" name="Slide Number Placeholder 3"/>
           <p:cNvSpPr>
             <a:spLocks noGrp="1"/>
           </p:cNvSpPr>
@@ -1378,7 +1379,7 @@
             <a:pPr>
               <a:defRPr/>
             </a:pPr>
-            <a:fld id="{FE1F7A1F-B323-71DB-F2AA-5085BC09A9D6}" type="slidenum">
+            <a:fld id="{632FB11F-0E1C-5F73-2BA6-164FF5FF0533}" type="slidenum">
               <a:rPr/>
               <a:t/>
             </a:fld>
@@ -1413,7 +1414,7 @@
       </p:grpSpPr>
       <p:sp>
         <p:nvSpPr>
-          <p:cNvPr id="425248221" name="Slide Image Placeholder 1"/>
+          <p:cNvPr id="2043106749" name="Slide Image Placeholder 1"/>
           <p:cNvSpPr>
             <a:spLocks noChangeAspect="1" noGrp="1" noRot="1"/>
           </p:cNvSpPr>
@@ -1425,7 +1426,7 @@
       </p:sp>
       <p:sp>
         <p:nvSpPr>
-          <p:cNvPr id="531319324" name="Notes Placeholder 2"/>
+          <p:cNvPr id="1948058707" name="Notes Placeholder 2"/>
           <p:cNvSpPr>
             <a:spLocks noGrp="1"/>
           </p:cNvSpPr>
@@ -1447,7 +1448,92 @@
       </p:sp>
       <p:sp>
         <p:nvSpPr>
-          <p:cNvPr id="475226690" name="Slide Number Placeholder 3"/>
+          <p:cNvPr id="414549398" name="Slide Number Placeholder 3"/>
+          <p:cNvSpPr>
+            <a:spLocks noGrp="1"/>
+          </p:cNvSpPr>
+          <p:nvPr>
+            <p:ph type="sldNum" sz="quarter" idx="10"/>
+          </p:nvPr>
+        </p:nvSpPr>
+        <p:spPr bwMode="auto"/>
+        <p:txBody>
+          <a:bodyPr/>
+          <a:lstStyle/>
+          <a:p>
+            <a:pPr>
+              <a:defRPr/>
+            </a:pPr>
+            <a:fld id="{FE1F7A1F-B323-71DB-F2AA-5085BC09A9D6}" type="slidenum">
+              <a:rPr/>
+              <a:t/>
+            </a:fld>
+            <a:endParaRPr/>
+          </a:p>
+        </p:txBody>
+      </p:sp>
+    </p:spTree>
+  </p:cSld>
+  <p:clrMapOvr>
+    <a:masterClrMapping/>
+  </p:clrMapOvr>
+</p:notes>
+</file>
+
+<file path=ppt/notesSlides/notesSlide9.xml><?xml version="1.0" encoding="utf-8"?>
+<p:notes xmlns:a="http://schemas.openxmlformats.org/drawingml/2006/main" xmlns:r="http://schemas.openxmlformats.org/officeDocument/2006/relationships" xmlns:p="http://schemas.openxmlformats.org/presentationml/2006/main" xmlns:m="http://schemas.openxmlformats.org/officeDocument/2006/math" xmlns:w="http://schemas.openxmlformats.org/wordprocessingml/2006/main">
+  <p:cSld name="">
+    <p:spTree>
+      <p:nvGrpSpPr>
+        <p:cNvPr id="1" name=""/>
+        <p:cNvGrpSpPr/>
+        <p:nvPr/>
+      </p:nvGrpSpPr>
+      <p:grpSpPr bwMode="auto">
+        <a:xfrm>
+          <a:off x="0" y="0"/>
+          <a:ext cx="0" cy="0"/>
+          <a:chOff x="0" y="0"/>
+          <a:chExt cx="0" cy="0"/>
+        </a:xfrm>
+      </p:grpSpPr>
+      <p:sp>
+        <p:nvSpPr>
+          <p:cNvPr id="1601449205" name="Slide Image Placeholder 1"/>
+          <p:cNvSpPr>
+            <a:spLocks noChangeAspect="1" noGrp="1" noRot="1"/>
+          </p:cNvSpPr>
+          <p:nvPr>
+            <p:ph type="sldImg"/>
+          </p:nvPr>
+        </p:nvSpPr>
+        <p:spPr bwMode="auto"/>
+      </p:sp>
+      <p:sp>
+        <p:nvSpPr>
+          <p:cNvPr id="113465724" name="Notes Placeholder 2"/>
+          <p:cNvSpPr>
+            <a:spLocks noGrp="1"/>
+          </p:cNvSpPr>
+          <p:nvPr>
+            <p:ph type="body" idx="1"/>
+          </p:nvPr>
+        </p:nvSpPr>
+        <p:spPr bwMode="auto"/>
+        <p:txBody>
+          <a:bodyPr/>
+          <a:lstStyle/>
+          <a:p>
+            <a:pPr>
+              <a:defRPr/>
+            </a:pPr>
+            <a:endParaRPr/>
+          </a:p>
+        </p:txBody>
+      </p:sp>
+      <p:sp>
+        <p:nvSpPr>
+          <p:cNvPr id="1412397703" name="Slide Number Placeholder 3"/>
           <p:cNvSpPr>
             <a:spLocks noGrp="1"/>
           </p:cNvSpPr>
@@ -1498,7 +1584,7 @@
       </p:grpSpPr>
       <p:sp>
         <p:nvSpPr>
-          <p:cNvPr id="1710339885" name="Shape 1059"/>
+          <p:cNvPr id="907293090" name="Shape 1059"/>
           <p:cNvSpPr>
             <a:spLocks noChangeArrowheads="1" noGrp="1"/>
           </p:cNvSpPr>
@@ -1621,7 +1707,7 @@
       </p:sp>
       <p:sp>
         <p:nvSpPr>
-          <p:cNvPr id="1853561115" name="Shape 1060"/>
+          <p:cNvPr id="2102137264" name="Shape 1060"/>
           <p:cNvSpPr>
             <a:spLocks noChangeArrowheads="1" noGrp="1"/>
           </p:cNvSpPr>
@@ -1712,7 +1798,7 @@
       </p:sp>
       <p:sp>
         <p:nvSpPr>
-          <p:cNvPr id="1754533790" name="Shape 1061"/>
+          <p:cNvPr id="1582832682" name="Shape 1061"/>
           <p:cNvSpPr>
             <a:spLocks noChangeArrowheads="1" noGrp="1"/>
           </p:cNvSpPr>
@@ -1798,7 +1884,7 @@
       </p:sp>
       <p:sp>
         <p:nvSpPr>
-          <p:cNvPr id="1064200702" name="Shape 1062"/>
+          <p:cNvPr id="1852697043" name="Shape 1062"/>
           <p:cNvSpPr>
             <a:spLocks noChangeArrowheads="1" noGrp="1"/>
           </p:cNvSpPr>
@@ -1876,7 +1962,7 @@
       </p:sp>
       <p:sp>
         <p:nvSpPr>
-          <p:cNvPr id="975453241" name="Shape 1063"/>
+          <p:cNvPr id="2023243668" name="Shape 1063"/>
           <p:cNvSpPr>
             <a:spLocks noChangeArrowheads="1" noGrp="1"/>
           </p:cNvSpPr>
@@ -1954,7 +2040,7 @@
       </p:sp>
       <p:sp>
         <p:nvSpPr>
-          <p:cNvPr id="93491606" name="Subtitle 2"/>
+          <p:cNvPr id="1454441590" name="Subtitle 2"/>
           <p:cNvSpPr>
             <a:spLocks noGrp="1"/>
           </p:cNvSpPr>
@@ -2077,7 +2163,7 @@
       </p:sp>
       <p:sp>
         <p:nvSpPr>
-          <p:cNvPr id="418768368" name="Date Placeholder 3"/>
+          <p:cNvPr id="911498258" name="Date Placeholder 3"/>
           <p:cNvSpPr>
             <a:spLocks noGrp="1"/>
           </p:cNvSpPr>
@@ -2103,7 +2189,7 @@
       </p:sp>
       <p:sp>
         <p:nvSpPr>
-          <p:cNvPr id="1980397378" name="Footer Placeholder 4"/>
+          <p:cNvPr id="740266201" name="Footer Placeholder 4"/>
           <p:cNvSpPr>
             <a:spLocks noGrp="1"/>
           </p:cNvSpPr>
@@ -2125,7 +2211,7 @@
       </p:sp>
       <p:sp>
         <p:nvSpPr>
-          <p:cNvPr id="304051835" name="Slide Number Placeholder 5"/>
+          <p:cNvPr id="879767466" name="Slide Number Placeholder 5"/>
           <p:cNvSpPr>
             <a:spLocks noGrp="1"/>
           </p:cNvSpPr>
@@ -2151,7 +2237,7 @@
       </p:sp>
       <p:sp>
         <p:nvSpPr>
-          <p:cNvPr id="2000596707" name="Title 6"/>
+          <p:cNvPr id="1502812060" name="Title 6"/>
           <p:cNvSpPr>
             <a:spLocks noGrp="1"/>
           </p:cNvSpPr>
@@ -2211,7 +2297,7 @@
       </p:grpSpPr>
       <p:sp>
         <p:nvSpPr>
-          <p:cNvPr id="798376248" name="Title 1"/>
+          <p:cNvPr id="321893946" name="Title 1"/>
           <p:cNvSpPr>
             <a:spLocks noGrp="1"/>
           </p:cNvSpPr>
@@ -2237,7 +2323,7 @@
       </p:sp>
       <p:sp>
         <p:nvSpPr>
-          <p:cNvPr id="2002113777" name="Vertical Text Placeholder 2"/>
+          <p:cNvPr id="1154205558" name="Vertical Text Placeholder 2"/>
           <p:cNvSpPr>
             <a:spLocks noGrp="1"/>
           </p:cNvSpPr>
@@ -2303,7 +2389,7 @@
       </p:sp>
       <p:sp>
         <p:nvSpPr>
-          <p:cNvPr id="392931532" name="Date Placeholder 3"/>
+          <p:cNvPr id="1622381045" name="Date Placeholder 3"/>
           <p:cNvSpPr>
             <a:spLocks noGrp="1"/>
           </p:cNvSpPr>
@@ -2329,7 +2415,7 @@
       </p:sp>
       <p:sp>
         <p:nvSpPr>
-          <p:cNvPr id="1297089959" name="Footer Placeholder 4"/>
+          <p:cNvPr id="2101784061" name="Footer Placeholder 4"/>
           <p:cNvSpPr>
             <a:spLocks noGrp="1"/>
           </p:cNvSpPr>
@@ -2351,7 +2437,7 @@
       </p:sp>
       <p:sp>
         <p:nvSpPr>
-          <p:cNvPr id="512872040" name="Slide Number Placeholder 5"/>
+          <p:cNvPr id="377200367" name="Slide Number Placeholder 5"/>
           <p:cNvSpPr>
             <a:spLocks noGrp="1"/>
           </p:cNvSpPr>
@@ -2402,7 +2488,7 @@
       </p:grpSpPr>
       <p:sp>
         <p:nvSpPr>
-          <p:cNvPr id="919710934" name="Vertical Title 1"/>
+          <p:cNvPr id="407637595" name="Vertical Title 1"/>
           <p:cNvSpPr>
             <a:spLocks noGrp="1"/>
           </p:cNvSpPr>
@@ -2437,7 +2523,7 @@
       </p:sp>
       <p:sp>
         <p:nvSpPr>
-          <p:cNvPr id="1244660427" name="Vertical Text Placeholder 2"/>
+          <p:cNvPr id="1690385891" name="Vertical Text Placeholder 2"/>
           <p:cNvSpPr>
             <a:spLocks noGrp="1"/>
           </p:cNvSpPr>
@@ -2508,7 +2594,7 @@
       </p:sp>
       <p:sp>
         <p:nvSpPr>
-          <p:cNvPr id="221825086" name="Date Placeholder 3"/>
+          <p:cNvPr id="1547911737" name="Date Placeholder 3"/>
           <p:cNvSpPr>
             <a:spLocks noGrp="1"/>
           </p:cNvSpPr>
@@ -2534,7 +2620,7 @@
       </p:sp>
       <p:sp>
         <p:nvSpPr>
-          <p:cNvPr id="126987352" name="Footer Placeholder 4"/>
+          <p:cNvPr id="2036090882" name="Footer Placeholder 4"/>
           <p:cNvSpPr>
             <a:spLocks noGrp="1"/>
           </p:cNvSpPr>
@@ -2556,7 +2642,7 @@
       </p:sp>
       <p:sp>
         <p:nvSpPr>
-          <p:cNvPr id="2101319701" name="Slide Number Placeholder 5"/>
+          <p:cNvPr id="465009396" name="Slide Number Placeholder 5"/>
           <p:cNvSpPr>
             <a:spLocks noGrp="1"/>
           </p:cNvSpPr>
@@ -2607,7 +2693,7 @@
       </p:grpSpPr>
       <p:sp>
         <p:nvSpPr>
-          <p:cNvPr id="897445798" name="Title 1"/>
+          <p:cNvPr id="1182486515" name="Title 1"/>
           <p:cNvSpPr>
             <a:spLocks noGrp="1"/>
           </p:cNvSpPr>
@@ -2633,7 +2719,7 @@
       </p:sp>
       <p:sp>
         <p:nvSpPr>
-          <p:cNvPr id="560023077" name="Content Placeholder 2"/>
+          <p:cNvPr id="1276855387" name="Content Placeholder 2"/>
           <p:cNvSpPr>
             <a:spLocks noGrp="1"/>
           </p:cNvSpPr>
@@ -2699,7 +2785,7 @@
       </p:sp>
       <p:sp>
         <p:nvSpPr>
-          <p:cNvPr id="69601634" name="Date Placeholder 3"/>
+          <p:cNvPr id="127975797" name="Date Placeholder 3"/>
           <p:cNvSpPr>
             <a:spLocks noGrp="1"/>
           </p:cNvSpPr>
@@ -2725,7 +2811,7 @@
       </p:sp>
       <p:sp>
         <p:nvSpPr>
-          <p:cNvPr id="1467689833" name="Footer Placeholder 4"/>
+          <p:cNvPr id="1977376319" name="Footer Placeholder 4"/>
           <p:cNvSpPr>
             <a:spLocks noGrp="1"/>
           </p:cNvSpPr>
@@ -2747,7 +2833,7 @@
       </p:sp>
       <p:sp>
         <p:nvSpPr>
-          <p:cNvPr id="785538655" name="Slide Number Placeholder 5"/>
+          <p:cNvPr id="357466552" name="Slide Number Placeholder 5"/>
           <p:cNvSpPr>
             <a:spLocks noGrp="1"/>
           </p:cNvSpPr>
@@ -2798,7 +2884,7 @@
       </p:grpSpPr>
       <p:sp>
         <p:nvSpPr>
-          <p:cNvPr id="1331064045" name="Title 1"/>
+          <p:cNvPr id="815721813" name="Title 1"/>
           <p:cNvSpPr>
             <a:spLocks noGrp="1"/>
           </p:cNvSpPr>
@@ -2833,7 +2919,7 @@
       </p:sp>
       <p:sp>
         <p:nvSpPr>
-          <p:cNvPr id="1217984179" name="Text Placeholder 2"/>
+          <p:cNvPr id="55800703" name="Text Placeholder 2"/>
           <p:cNvSpPr>
             <a:spLocks noGrp="1"/>
           </p:cNvSpPr>
@@ -2955,7 +3041,7 @@
       </p:sp>
       <p:sp>
         <p:nvSpPr>
-          <p:cNvPr id="1935683632" name="Date Placeholder 3"/>
+          <p:cNvPr id="617412460" name="Date Placeholder 3"/>
           <p:cNvSpPr>
             <a:spLocks noGrp="1"/>
           </p:cNvSpPr>
@@ -2981,7 +3067,7 @@
       </p:sp>
       <p:sp>
         <p:nvSpPr>
-          <p:cNvPr id="2057161644" name="Footer Placeholder 4"/>
+          <p:cNvPr id="1682808656" name="Footer Placeholder 4"/>
           <p:cNvSpPr>
             <a:spLocks noGrp="1"/>
           </p:cNvSpPr>
@@ -3003,7 +3089,7 @@
       </p:sp>
       <p:sp>
         <p:nvSpPr>
-          <p:cNvPr id="2044985659" name="Slide Number Placeholder 5"/>
+          <p:cNvPr id="136966314" name="Slide Number Placeholder 5"/>
           <p:cNvSpPr>
             <a:spLocks noGrp="1"/>
           </p:cNvSpPr>
@@ -3054,7 +3140,7 @@
       </p:grpSpPr>
       <p:sp>
         <p:nvSpPr>
-          <p:cNvPr id="1476585091" name="Title 1"/>
+          <p:cNvPr id="1366855177" name="Title 1"/>
           <p:cNvSpPr>
             <a:spLocks noGrp="1"/>
           </p:cNvSpPr>
@@ -3080,7 +3166,7 @@
       </p:sp>
       <p:sp>
         <p:nvSpPr>
-          <p:cNvPr id="1823465060" name="Content Placeholder 2"/>
+          <p:cNvPr id="1163624466" name="Content Placeholder 2"/>
           <p:cNvSpPr>
             <a:spLocks noGrp="1"/>
           </p:cNvSpPr>
@@ -3179,7 +3265,7 @@
       </p:sp>
       <p:sp>
         <p:nvSpPr>
-          <p:cNvPr id="2113960475" name="Content Placeholder 3"/>
+          <p:cNvPr id="1478693088" name="Content Placeholder 3"/>
           <p:cNvSpPr>
             <a:spLocks noGrp="1"/>
           </p:cNvSpPr>
@@ -3278,7 +3364,7 @@
       </p:sp>
       <p:sp>
         <p:nvSpPr>
-          <p:cNvPr id="628111992" name="Date Placeholder 4"/>
+          <p:cNvPr id="912082436" name="Date Placeholder 4"/>
           <p:cNvSpPr>
             <a:spLocks noGrp="1"/>
           </p:cNvSpPr>
@@ -3304,7 +3390,7 @@
       </p:sp>
       <p:sp>
         <p:nvSpPr>
-          <p:cNvPr id="1741363594" name="Footer Placeholder 5"/>
+          <p:cNvPr id="630042715" name="Footer Placeholder 5"/>
           <p:cNvSpPr>
             <a:spLocks noGrp="1"/>
           </p:cNvSpPr>
@@ -3326,7 +3412,7 @@
       </p:sp>
       <p:sp>
         <p:nvSpPr>
-          <p:cNvPr id="156814234" name="Slide Number Placeholder 6"/>
+          <p:cNvPr id="192369089" name="Slide Number Placeholder 6"/>
           <p:cNvSpPr>
             <a:spLocks noGrp="1"/>
           </p:cNvSpPr>
@@ -3377,7 +3463,7 @@
       </p:grpSpPr>
       <p:sp>
         <p:nvSpPr>
-          <p:cNvPr id="2116529745" name="Title 1"/>
+          <p:cNvPr id="1748516319" name="Title 1"/>
           <p:cNvSpPr>
             <a:spLocks noGrp="1"/>
           </p:cNvSpPr>
@@ -3407,7 +3493,7 @@
       </p:sp>
       <p:sp>
         <p:nvSpPr>
-          <p:cNvPr id="2018496283" name="Text Placeholder 2"/>
+          <p:cNvPr id="1128332742" name="Text Placeholder 2"/>
           <p:cNvSpPr>
             <a:spLocks noGrp="1"/>
           </p:cNvSpPr>
@@ -3475,7 +3561,7 @@
       </p:sp>
       <p:sp>
         <p:nvSpPr>
-          <p:cNvPr id="596862477" name="Content Placeholder 3"/>
+          <p:cNvPr id="2010424329" name="Content Placeholder 3"/>
           <p:cNvSpPr>
             <a:spLocks noGrp="1"/>
           </p:cNvSpPr>
@@ -3574,7 +3660,7 @@
       </p:sp>
       <p:sp>
         <p:nvSpPr>
-          <p:cNvPr id="1371557740" name="Text Placeholder 4"/>
+          <p:cNvPr id="1888679753" name="Text Placeholder 4"/>
           <p:cNvSpPr>
             <a:spLocks noGrp="1"/>
           </p:cNvSpPr>
@@ -3642,7 +3728,7 @@
       </p:sp>
       <p:sp>
         <p:nvSpPr>
-          <p:cNvPr id="958868502" name="Content Placeholder 5"/>
+          <p:cNvPr id="857278317" name="Content Placeholder 5"/>
           <p:cNvSpPr>
             <a:spLocks noGrp="1"/>
           </p:cNvSpPr>
@@ -3741,7 +3827,7 @@
       </p:sp>
       <p:sp>
         <p:nvSpPr>
-          <p:cNvPr id="2060098897" name="Date Placeholder 6"/>
+          <p:cNvPr id="1148438110" name="Date Placeholder 6"/>
           <p:cNvSpPr>
             <a:spLocks noGrp="1"/>
           </p:cNvSpPr>
@@ -3767,7 +3853,7 @@
       </p:sp>
       <p:sp>
         <p:nvSpPr>
-          <p:cNvPr id="798921486" name="Footer Placeholder 7"/>
+          <p:cNvPr id="1827087287" name="Footer Placeholder 7"/>
           <p:cNvSpPr>
             <a:spLocks noGrp="1"/>
           </p:cNvSpPr>
@@ -3789,7 +3875,7 @@
       </p:sp>
       <p:sp>
         <p:nvSpPr>
-          <p:cNvPr id="1374245685" name="Slide Number Placeholder 8"/>
+          <p:cNvPr id="1179837600" name="Slide Number Placeholder 8"/>
           <p:cNvSpPr>
             <a:spLocks noGrp="1"/>
           </p:cNvSpPr>
@@ -3840,7 +3926,7 @@
       </p:grpSpPr>
       <p:sp>
         <p:nvSpPr>
-          <p:cNvPr id="1584688903" name="Title 1"/>
+          <p:cNvPr id="1840865097" name="Title 1"/>
           <p:cNvSpPr>
             <a:spLocks noGrp="1"/>
           </p:cNvSpPr>
@@ -3866,7 +3952,7 @@
       </p:sp>
       <p:sp>
         <p:nvSpPr>
-          <p:cNvPr id="1132244266" name="Date Placeholder 2"/>
+          <p:cNvPr id="1119625146" name="Date Placeholder 2"/>
           <p:cNvSpPr>
             <a:spLocks noGrp="1"/>
           </p:cNvSpPr>
@@ -3892,7 +3978,7 @@
       </p:sp>
       <p:sp>
         <p:nvSpPr>
-          <p:cNvPr id="1533550676" name="Footer Placeholder 3"/>
+          <p:cNvPr id="383552377" name="Footer Placeholder 3"/>
           <p:cNvSpPr>
             <a:spLocks noGrp="1"/>
           </p:cNvSpPr>
@@ -3914,7 +4000,7 @@
       </p:sp>
       <p:sp>
         <p:nvSpPr>
-          <p:cNvPr id="259267463" name="Slide Number Placeholder 4"/>
+          <p:cNvPr id="1535881032" name="Slide Number Placeholder 4"/>
           <p:cNvSpPr>
             <a:spLocks noGrp="1"/>
           </p:cNvSpPr>
@@ -3965,7 +4051,7 @@
       </p:grpSpPr>
       <p:sp>
         <p:nvSpPr>
-          <p:cNvPr id="1522336360" name="Date Placeholder 1"/>
+          <p:cNvPr id="1954656224" name="Date Placeholder 1"/>
           <p:cNvSpPr>
             <a:spLocks noGrp="1"/>
           </p:cNvSpPr>
@@ -3991,7 +4077,7 @@
       </p:sp>
       <p:sp>
         <p:nvSpPr>
-          <p:cNvPr id="83434217" name="Footer Placeholder 2"/>
+          <p:cNvPr id="464165457" name="Footer Placeholder 2"/>
           <p:cNvSpPr>
             <a:spLocks noGrp="1"/>
           </p:cNvSpPr>
@@ -4013,7 +4099,7 @@
       </p:sp>
       <p:sp>
         <p:nvSpPr>
-          <p:cNvPr id="393783880" name="Slide Number Placeholder 3"/>
+          <p:cNvPr id="967315235" name="Slide Number Placeholder 3"/>
           <p:cNvSpPr>
             <a:spLocks noGrp="1"/>
           </p:cNvSpPr>
@@ -4064,7 +4150,7 @@
       </p:grpSpPr>
       <p:sp>
         <p:nvSpPr>
-          <p:cNvPr id="185041053" name="Title 1"/>
+          <p:cNvPr id="1129090892" name="Title 1"/>
           <p:cNvSpPr>
             <a:spLocks noGrp="1"/>
           </p:cNvSpPr>
@@ -4099,7 +4185,7 @@
       </p:sp>
       <p:sp>
         <p:nvSpPr>
-          <p:cNvPr id="1850463331" name="Content Placeholder 2"/>
+          <p:cNvPr id="1304675916" name="Content Placeholder 2"/>
           <p:cNvSpPr>
             <a:spLocks noGrp="1"/>
           </p:cNvSpPr>
@@ -4198,7 +4284,7 @@
       </p:sp>
       <p:sp>
         <p:nvSpPr>
-          <p:cNvPr id="1304244565" name="Text Placeholder 3"/>
+          <p:cNvPr id="815424229" name="Text Placeholder 3"/>
           <p:cNvSpPr>
             <a:spLocks noGrp="1"/>
           </p:cNvSpPr>
@@ -4266,7 +4352,7 @@
       </p:sp>
       <p:sp>
         <p:nvSpPr>
-          <p:cNvPr id="418204710" name="Date Placeholder 4"/>
+          <p:cNvPr id="618033860" name="Date Placeholder 4"/>
           <p:cNvSpPr>
             <a:spLocks noGrp="1"/>
           </p:cNvSpPr>
@@ -4292,7 +4378,7 @@
       </p:sp>
       <p:sp>
         <p:nvSpPr>
-          <p:cNvPr id="1796880264" name="Footer Placeholder 5"/>
+          <p:cNvPr id="332595973" name="Footer Placeholder 5"/>
           <p:cNvSpPr>
             <a:spLocks noGrp="1"/>
           </p:cNvSpPr>
@@ -4314,7 +4400,7 @@
       </p:sp>
       <p:sp>
         <p:nvSpPr>
-          <p:cNvPr id="201621686" name="Slide Number Placeholder 6"/>
+          <p:cNvPr id="552555218" name="Slide Number Placeholder 6"/>
           <p:cNvSpPr>
             <a:spLocks noGrp="1"/>
           </p:cNvSpPr>
@@ -4365,7 +4451,7 @@
       </p:grpSpPr>
       <p:sp>
         <p:nvSpPr>
-          <p:cNvPr id="1848722928" name="Title 1"/>
+          <p:cNvPr id="428761731" name="Title 1"/>
           <p:cNvSpPr>
             <a:spLocks noGrp="1"/>
           </p:cNvSpPr>
@@ -4400,7 +4486,7 @@
       </p:sp>
       <p:sp>
         <p:nvSpPr>
-          <p:cNvPr id="1976738741" name="Picture Placeholder 2"/>
+          <p:cNvPr id="604924706" name="Picture Placeholder 2"/>
           <p:cNvSpPr>
             <a:spLocks noGrp="1"/>
           </p:cNvSpPr>
@@ -4464,7 +4550,7 @@
       </p:sp>
       <p:sp>
         <p:nvSpPr>
-          <p:cNvPr id="1517193280" name="Text Placeholder 3"/>
+          <p:cNvPr id="1235035360" name="Text Placeholder 3"/>
           <p:cNvSpPr>
             <a:spLocks noGrp="1"/>
           </p:cNvSpPr>
@@ -4532,7 +4618,7 @@
       </p:sp>
       <p:sp>
         <p:nvSpPr>
-          <p:cNvPr id="1783526725" name="Date Placeholder 4"/>
+          <p:cNvPr id="1993969921" name="Date Placeholder 4"/>
           <p:cNvSpPr>
             <a:spLocks noGrp="1"/>
           </p:cNvSpPr>
@@ -4558,7 +4644,7 @@
       </p:sp>
       <p:sp>
         <p:nvSpPr>
-          <p:cNvPr id="2085002119" name="Footer Placeholder 5"/>
+          <p:cNvPr id="713912726" name="Footer Placeholder 5"/>
           <p:cNvSpPr>
             <a:spLocks noGrp="1"/>
           </p:cNvSpPr>
@@ -4580,7 +4666,7 @@
       </p:sp>
       <p:sp>
         <p:nvSpPr>
-          <p:cNvPr id="1046703242" name="Slide Number Placeholder 6"/>
+          <p:cNvPr id="1540256640" name="Slide Number Placeholder 6"/>
           <p:cNvSpPr>
             <a:spLocks noGrp="1"/>
           </p:cNvSpPr>
@@ -4636,7 +4722,7 @@
       </p:grpSpPr>
       <p:sp>
         <p:nvSpPr>
-          <p:cNvPr id="1362634519" name="Shape 1059"/>
+          <p:cNvPr id="336994994" name="Shape 1059"/>
           <p:cNvSpPr>
             <a:spLocks noChangeArrowheads="1" noGrp="1"/>
           </p:cNvSpPr>
@@ -4714,7 +4800,7 @@
       </p:sp>
       <p:sp>
         <p:nvSpPr>
-          <p:cNvPr id="905303359" name="Shape 1060"/>
+          <p:cNvPr id="2136601979" name="Shape 1060"/>
           <p:cNvSpPr>
             <a:spLocks noChangeArrowheads="1" noGrp="1"/>
           </p:cNvSpPr>
@@ -4795,7 +4881,7 @@
       </p:sp>
       <p:sp>
         <p:nvSpPr>
-          <p:cNvPr id="200487203" name="Shape 1061"/>
+          <p:cNvPr id="967940342" name="Shape 1061"/>
           <p:cNvSpPr>
             <a:spLocks noChangeArrowheads="1" noGrp="1"/>
           </p:cNvSpPr>
@@ -4913,7 +4999,7 @@
       </p:sp>
       <p:sp>
         <p:nvSpPr>
-          <p:cNvPr id="2057450558" name="Title 1"/>
+          <p:cNvPr id="96365301" name="Title 1"/>
           <p:cNvSpPr>
             <a:spLocks noGrp="1"/>
           </p:cNvSpPr>
@@ -4949,7 +5035,7 @@
       </p:sp>
       <p:sp>
         <p:nvSpPr>
-          <p:cNvPr id="1925478825" name="Text Placeholder 2"/>
+          <p:cNvPr id="684670151" name="Text Placeholder 2"/>
           <p:cNvSpPr>
             <a:spLocks noGrp="1"/>
           </p:cNvSpPr>
@@ -5025,7 +5111,7 @@
       </p:sp>
       <p:sp>
         <p:nvSpPr>
-          <p:cNvPr id="2084087575" name="Date Placeholder 3"/>
+          <p:cNvPr id="1691378125" name="Date Placeholder 3"/>
           <p:cNvSpPr>
             <a:spLocks noGrp="1"/>
           </p:cNvSpPr>
@@ -5069,7 +5155,7 @@
       </p:sp>
       <p:sp>
         <p:nvSpPr>
-          <p:cNvPr id="314876584" name="Footer Placeholder 4"/>
+          <p:cNvPr id="31269162" name="Footer Placeholder 4"/>
           <p:cNvSpPr>
             <a:spLocks noGrp="1"/>
           </p:cNvSpPr>
@@ -5109,7 +5195,7 @@
       </p:sp>
       <p:sp>
         <p:nvSpPr>
-          <p:cNvPr id="1376970590" name="Slide Number Placeholder 5"/>
+          <p:cNvPr id="1895651003" name="Slide Number Placeholder 5"/>
           <p:cNvSpPr>
             <a:spLocks noGrp="1"/>
           </p:cNvSpPr>
@@ -5457,7 +5543,7 @@
       </p:grpSpPr>
       <p:sp>
         <p:nvSpPr>
-          <p:cNvPr id="454069754" name="Title 1"/>
+          <p:cNvPr id="1111525971" name="Title 1"/>
           <p:cNvSpPr>
             <a:spLocks noGrp="1"/>
           </p:cNvSpPr>
@@ -5520,7 +5606,7 @@
       </p:sp>
       <p:sp>
         <p:nvSpPr>
-          <p:cNvPr id="365166917" name="Subtitle 2"/>
+          <p:cNvPr id="1583910671" name="Subtitle 2"/>
           <p:cNvSpPr>
             <a:spLocks noGrp="1"/>
           </p:cNvSpPr>
@@ -5529,14 +5615,14 @@
           </p:nvPr>
         </p:nvSpPr>
         <p:spPr bwMode="auto">
-          <a:xfrm>
-            <a:off x="4637403" y="5572563"/>
-            <a:ext cx="6720745" cy="720079"/>
+          <a:xfrm flipH="0" flipV="0">
+            <a:off x="6489919" y="5228302"/>
+            <a:ext cx="5083309" cy="1007806"/>
           </a:xfrm>
         </p:spPr>
         <p:txBody>
           <a:bodyPr vertOverflow="overflow" horzOverflow="overflow" vert="horz" wrap="square" lIns="91440" tIns="45720" rIns="91440" bIns="45720" numCol="1" spcCol="0" rtlCol="0" fromWordArt="0" anchor="t" anchorCtr="0" forceAA="0" upright="0" compatLnSpc="0">
-            <a:normAutofit fontScale="85000" lnSpcReduction="3000"/>
+            <a:normAutofit/>
           </a:bodyPr>
           <a:lstStyle/>
           <a:p>
@@ -5544,7 +5630,18 @@
               <a:defRPr/>
             </a:pPr>
             <a:r>
-              <a:rPr lang="ro-RO" sz="2600">
+              <a:rPr lang="en-US" sz="1600">
+                <a:solidFill>
+                  <a:srgbClr val="808080"/>
+                </a:solidFill>
+                <a:latin typeface="Cantarell"/>
+                <a:ea typeface="Cantarell"/>
+                <a:cs typeface="Cantarell"/>
+              </a:rPr>
+              <a:t>Absolvent: </a:t>
+            </a:r>
+            <a:r>
+              <a:rPr lang="ro-RO" sz="1600">
                 <a:solidFill>
                   <a:srgbClr val="808080"/>
                 </a:solidFill>
@@ -5555,25 +5652,7 @@
               <a:t>Theodor </a:t>
             </a:r>
             <a:r>
-              <a:rPr lang="ro-RO" sz="2600">
-                <a:latin typeface="Cantarell"/>
-                <a:ea typeface="Cantarell"/>
-                <a:cs typeface="Cantarell"/>
-              </a:rPr>
-              <a:t>Predescu, grupa 342A1</a:t>
-            </a:r>
-            <a:endParaRPr lang="ro-RO" sz="2600">
-              <a:latin typeface="Cantarell"/>
-              <a:ea typeface="Cantarell"/>
-              <a:cs typeface="Cantarell"/>
-            </a:endParaRPr>
-          </a:p>
-          <a:p>
-            <a:pPr>
-              <a:defRPr/>
-            </a:pPr>
-            <a:r>
-              <a:rPr lang="en-US" sz="2600">
+              <a:rPr lang="ro-RO" sz="1600">
                 <a:solidFill>
                   <a:srgbClr val="808080"/>
                 </a:solidFill>
@@ -5581,10 +5660,208 @@
                 <a:ea typeface="Cantarell"/>
                 <a:cs typeface="Cantarell"/>
               </a:rPr>
-              <a:t>coordonator</a:t>
-            </a:r>
-            <a:r>
-              <a:rPr lang="en-US" sz="2600" b="0" i="0" u="none">
+              <a:t>Predescu, grupa 342A1</a:t>
+            </a:r>
+            <a:endParaRPr sz="1600">
+              <a:solidFill>
+                <a:srgbClr val="808080"/>
+              </a:solidFill>
+              <a:latin typeface="Cantarell"/>
+              <a:ea typeface="Cantarell"/>
+              <a:cs typeface="Cantarell"/>
+            </a:endParaRPr>
+          </a:p>
+          <a:p>
+            <a:pPr>
+              <a:defRPr/>
+            </a:pPr>
+            <a:endParaRPr sz="1600">
+              <a:latin typeface="Cantarell"/>
+              <a:cs typeface="Cantarell"/>
+            </a:endParaRPr>
+          </a:p>
+        </p:txBody>
+      </p:sp>
+      <p:sp>
+        <p:nvSpPr>
+          <p:cNvPr id="1860226843" name="Subtitle 2"/>
+          <p:cNvSpPr>
+            <a:spLocks noGrp="1"/>
+          </p:cNvSpPr>
+          <p:nvPr/>
+        </p:nvSpPr>
+        <p:spPr bwMode="auto">
+          <a:xfrm flipH="0" flipV="0">
+            <a:off x="644641" y="5228302"/>
+            <a:ext cx="5083308" cy="1216737"/>
+          </a:xfrm>
+        </p:spPr>
+        <p:txBody>
+          <a:bodyPr vertOverflow="overflow" horzOverflow="overflow" vert="horz" wrap="square" lIns="91440" tIns="45720" rIns="91440" bIns="45720" numCol="1" spcCol="0" rtlCol="0" fromWordArt="0" anchor="t" anchorCtr="0" forceAA="0" upright="0" compatLnSpc="0">
+            <a:normAutofit/>
+          </a:bodyPr>
+          <a:lstStyle>
+            <a:lvl1pPr marL="0" indent="0" algn="r" defTabSz="914400" rtl="0">
+              <a:spcBef>
+                <a:spcPts val="0"/>
+              </a:spcBef>
+              <a:buFont typeface="Arial"/>
+              <a:buNone/>
+              <a:defRPr sz="3200">
+                <a:solidFill>
+                  <a:schemeClr val="tx1">
+                    <a:lumMod val="50000"/>
+                    <a:lumOff val="50000"/>
+                  </a:schemeClr>
+                </a:solidFill>
+                <a:latin typeface="+mn-lt"/>
+                <a:ea typeface="+mn-ea"/>
+                <a:cs typeface="+mn-cs"/>
+              </a:defRPr>
+            </a:lvl1pPr>
+            <a:lvl2pPr marL="457200" indent="0" algn="ctr" defTabSz="914400" rtl="0">
+              <a:spcBef>
+                <a:spcPts val="0"/>
+              </a:spcBef>
+              <a:buFont typeface="Arial"/>
+              <a:buNone/>
+              <a:defRPr sz="2800">
+                <a:solidFill>
+                  <a:schemeClr val="tx1">
+                    <a:tint val="75000"/>
+                  </a:schemeClr>
+                </a:solidFill>
+                <a:latin typeface="+mn-lt"/>
+                <a:ea typeface="+mn-ea"/>
+                <a:cs typeface="+mn-cs"/>
+              </a:defRPr>
+            </a:lvl2pPr>
+            <a:lvl3pPr marL="914400" indent="0" algn="ctr" defTabSz="914400" rtl="0">
+              <a:spcBef>
+                <a:spcPts val="0"/>
+              </a:spcBef>
+              <a:buFont typeface="Arial"/>
+              <a:buNone/>
+              <a:defRPr sz="2400">
+                <a:solidFill>
+                  <a:schemeClr val="tx1">
+                    <a:tint val="75000"/>
+                  </a:schemeClr>
+                </a:solidFill>
+                <a:latin typeface="+mn-lt"/>
+                <a:ea typeface="+mn-ea"/>
+                <a:cs typeface="+mn-cs"/>
+              </a:defRPr>
+            </a:lvl3pPr>
+            <a:lvl4pPr marL="1371600" indent="0" algn="ctr" defTabSz="914400" rtl="0">
+              <a:spcBef>
+                <a:spcPts val="0"/>
+              </a:spcBef>
+              <a:buFont typeface="Arial"/>
+              <a:buNone/>
+              <a:defRPr sz="2000">
+                <a:solidFill>
+                  <a:schemeClr val="tx1">
+                    <a:tint val="75000"/>
+                  </a:schemeClr>
+                </a:solidFill>
+                <a:latin typeface="+mn-lt"/>
+                <a:ea typeface="+mn-ea"/>
+                <a:cs typeface="+mn-cs"/>
+              </a:defRPr>
+            </a:lvl4pPr>
+            <a:lvl5pPr marL="1828800" indent="0" algn="ctr" defTabSz="914400" rtl="0">
+              <a:spcBef>
+                <a:spcPts val="0"/>
+              </a:spcBef>
+              <a:buFont typeface="Arial"/>
+              <a:buNone/>
+              <a:defRPr sz="2000">
+                <a:solidFill>
+                  <a:schemeClr val="tx1">
+                    <a:tint val="75000"/>
+                  </a:schemeClr>
+                </a:solidFill>
+                <a:latin typeface="+mn-lt"/>
+                <a:ea typeface="+mn-ea"/>
+                <a:cs typeface="+mn-cs"/>
+              </a:defRPr>
+            </a:lvl5pPr>
+            <a:lvl6pPr marL="2286000" indent="0" algn="ctr" defTabSz="914400" rtl="0">
+              <a:spcBef>
+                <a:spcPts val="0"/>
+              </a:spcBef>
+              <a:buFont typeface="Arial"/>
+              <a:buNone/>
+              <a:defRPr sz="2000">
+                <a:solidFill>
+                  <a:schemeClr val="tx1">
+                    <a:tint val="75000"/>
+                  </a:schemeClr>
+                </a:solidFill>
+                <a:latin typeface="+mn-lt"/>
+                <a:ea typeface="+mn-ea"/>
+                <a:cs typeface="+mn-cs"/>
+              </a:defRPr>
+            </a:lvl6pPr>
+            <a:lvl7pPr marL="2743200" indent="0" algn="ctr" defTabSz="914400" rtl="0">
+              <a:spcBef>
+                <a:spcPts val="0"/>
+              </a:spcBef>
+              <a:buFont typeface="Arial"/>
+              <a:buNone/>
+              <a:defRPr sz="2000">
+                <a:solidFill>
+                  <a:schemeClr val="tx1">
+                    <a:tint val="75000"/>
+                  </a:schemeClr>
+                </a:solidFill>
+                <a:latin typeface="+mn-lt"/>
+                <a:ea typeface="+mn-ea"/>
+                <a:cs typeface="+mn-cs"/>
+              </a:defRPr>
+            </a:lvl7pPr>
+            <a:lvl8pPr marL="3200400" indent="0" algn="ctr" defTabSz="914400" rtl="0">
+              <a:spcBef>
+                <a:spcPts val="0"/>
+              </a:spcBef>
+              <a:buFont typeface="Arial"/>
+              <a:buNone/>
+              <a:defRPr sz="2000">
+                <a:solidFill>
+                  <a:schemeClr val="tx1">
+                    <a:tint val="75000"/>
+                  </a:schemeClr>
+                </a:solidFill>
+                <a:latin typeface="+mn-lt"/>
+                <a:ea typeface="+mn-ea"/>
+                <a:cs typeface="+mn-cs"/>
+              </a:defRPr>
+            </a:lvl8pPr>
+            <a:lvl9pPr marL="3657600" indent="0" algn="ctr" defTabSz="914400" rtl="0">
+              <a:spcBef>
+                <a:spcPts val="0"/>
+              </a:spcBef>
+              <a:buFont typeface="Arial"/>
+              <a:buNone/>
+              <a:defRPr sz="2000">
+                <a:solidFill>
+                  <a:schemeClr val="tx1">
+                    <a:tint val="75000"/>
+                  </a:schemeClr>
+                </a:solidFill>
+                <a:latin typeface="+mn-lt"/>
+                <a:ea typeface="+mn-ea"/>
+                <a:cs typeface="+mn-cs"/>
+              </a:defRPr>
+            </a:lvl9pPr>
+          </a:lstStyle>
+          <a:p>
+            <a:pPr algn="l">
+              <a:defRPr/>
+            </a:pPr>
+            <a:r>
+              <a:rPr sz="1600" b="0" i="0" u="none">
                 <a:solidFill>
                   <a:srgbClr val="808080"/>
                 </a:solidFill>
@@ -5592,10 +5869,22 @@
                 <a:ea typeface="Cantarell"/>
                 <a:cs typeface="Cantarell"/>
               </a:rPr>
-              <a:t> </a:t>
-            </a:r>
-            <a:r>
-              <a:rPr sz="2600" b="0" i="0" u="none">
+              <a:t>Conducător științific: Conf. dr. Ing. Florin Daniel Anton </a:t>
+            </a:r>
+            <a:endParaRPr sz="1600">
+              <a:solidFill>
+                <a:srgbClr val="808080"/>
+              </a:solidFill>
+              <a:latin typeface="Cantarell"/>
+              <a:cs typeface="Cantarell"/>
+            </a:endParaRPr>
+          </a:p>
+          <a:p>
+            <a:pPr algn="l">
+              <a:defRPr/>
+            </a:pPr>
+            <a:r>
+              <a:rPr sz="1600" b="0" i="0" u="none">
                 <a:solidFill>
                   <a:srgbClr val="808080"/>
                 </a:solidFill>
@@ -5603,9 +5892,9 @@
                 <a:ea typeface="Cantarell"/>
                 <a:cs typeface="Cantarell"/>
               </a:rPr>
-              <a:t>Conf. dr. Ing. Florin Daniel Anton</a:t>
-            </a:r>
-            <a:endParaRPr lang="ro-RO" sz="2600">
+              <a:t>Asistent coordonator: Drd. Ing. Ana-Theodora Mitran</a:t>
+            </a:r>
+            <a:endParaRPr sz="1600">
               <a:latin typeface="Cantarell"/>
               <a:cs typeface="Cantarell"/>
             </a:endParaRPr>
@@ -5647,7 +5936,7 @@
       </p:grpSpPr>
       <p:sp>
         <p:nvSpPr>
-          <p:cNvPr id="1881325607" name="Title 1"/>
+          <p:cNvPr id="1995068118" name="Title 1"/>
           <p:cNvSpPr>
             <a:spLocks noGrp="1"/>
           </p:cNvSpPr>
@@ -5669,14 +5958,14 @@
               <a:defRPr/>
             </a:pPr>
             <a:r>
-              <a:rPr>
+              <a:rPr b="1">
                 <a:latin typeface="Cantarell"/>
                 <a:ea typeface="Cantarell"/>
                 <a:cs typeface="Cantarell"/>
               </a:rPr>
               <a:t>Domeniul de lucru</a:t>
             </a:r>
-            <a:endParaRPr>
+            <a:endParaRPr b="1">
               <a:latin typeface="Cantarell"/>
               <a:cs typeface="Cantarell"/>
             </a:endParaRPr>
@@ -5685,7 +5974,7 @@
       </p:sp>
       <p:sp>
         <p:nvSpPr>
-          <p:cNvPr id="908359208" name="Content Placeholder 2"/>
+          <p:cNvPr id="1131668895" name="Content Placeholder 2"/>
           <p:cNvSpPr>
             <a:spLocks noGrp="1"/>
           </p:cNvSpPr>
@@ -5695,28 +5984,70 @@
         </p:nvSpPr>
         <p:spPr bwMode="auto">
           <a:xfrm flipH="0" flipV="0">
-            <a:off x="609598" y="3435144"/>
-            <a:ext cx="5486400" cy="927919"/>
+            <a:off x="584419" y="3870928"/>
+            <a:ext cx="5486400" cy="1499236"/>
           </a:xfrm>
         </p:spPr>
         <p:txBody>
-          <a:bodyPr/>
+          <a:bodyPr vertOverflow="overflow" horzOverflow="overflow" vert="horz" wrap="square" lIns="91440" tIns="45720" rIns="91440" bIns="45720" numCol="1" spcCol="0" rtlCol="0" fromWordArt="0" anchor="t" anchorCtr="0" forceAA="0" upright="0" compatLnSpc="0">
+            <a:normAutofit/>
+          </a:bodyPr>
           <a:lstStyle/>
           <a:p>
-            <a:pPr marL="0" indent="0">
+            <a:pPr>
               <a:buFont typeface="Arial"/>
-              <a:buNone/>
-              <a:defRPr/>
-            </a:pPr>
-            <a:r>
-              <a:rPr>
+              <a:buChar char="–"/>
+              <a:defRPr/>
+            </a:pPr>
+            <a:r>
+              <a:rPr sz="2200">
                 <a:latin typeface="Cantarell"/>
                 <a:ea typeface="Cantarell"/>
                 <a:cs typeface="Cantarell"/>
               </a:rPr>
-              <a:t>Mediul industrial</a:t>
-            </a:r>
-            <a:endParaRPr>
+              <a:t>Rețele industriale specializate</a:t>
+            </a:r>
+            <a:endParaRPr sz="2200">
+              <a:latin typeface="Cantarell"/>
+              <a:ea typeface="Cantarell"/>
+              <a:cs typeface="Cantarell"/>
+            </a:endParaRPr>
+          </a:p>
+          <a:p>
+            <a:pPr>
+              <a:buFont typeface="Arial"/>
+              <a:buChar char="–"/>
+              <a:defRPr/>
+            </a:pPr>
+            <a:r>
+              <a:rPr sz="2200">
+                <a:latin typeface="Cantarell"/>
+                <a:ea typeface="Cantarell"/>
+                <a:cs typeface="Cantarell"/>
+              </a:rPr>
+              <a:t>Echipamente cu durata lungă de viață</a:t>
+            </a:r>
+            <a:endParaRPr sz="2200">
+              <a:latin typeface="Cantarell"/>
+              <a:ea typeface="Cantarell"/>
+              <a:cs typeface="Cantarell"/>
+            </a:endParaRPr>
+          </a:p>
+          <a:p>
+            <a:pPr>
+              <a:buFont typeface="Arial"/>
+              <a:buChar char="–"/>
+              <a:defRPr/>
+            </a:pPr>
+            <a:r>
+              <a:rPr sz="2200">
+                <a:latin typeface="Cantarell"/>
+                <a:ea typeface="Cantarell"/>
+                <a:cs typeface="Cantarell"/>
+              </a:rPr>
+              <a:t>Prioritate a disponibilității continue</a:t>
+            </a:r>
+            <a:endParaRPr sz="2600">
               <a:latin typeface="Cantarell"/>
               <a:cs typeface="Cantarell"/>
             </a:endParaRPr>
@@ -5725,7 +6056,7 @@
       </p:sp>
       <p:pic>
         <p:nvPicPr>
-          <p:cNvPr id="932518508" name=""/>
+          <p:cNvPr id="265512856" name=""/>
           <p:cNvPicPr>
             <a:picLocks noChangeAspect="1"/>
           </p:cNvPicPr>
@@ -5745,6 +6076,51 @@
           </a:prstGeom>
         </p:spPr>
       </p:pic>
+      <p:sp>
+        <p:nvSpPr>
+          <p:cNvPr id="1158314269" name=""/>
+          <p:cNvSpPr txBox="1"/>
+          <p:nvPr/>
+        </p:nvSpPr>
+        <p:spPr bwMode="auto">
+          <a:xfrm rot="0" flipH="0" flipV="0">
+            <a:off x="609597" y="3004983"/>
+            <a:ext cx="5082768" cy="640440"/>
+          </a:xfrm>
+          <a:prstGeom prst="rect">
+            <a:avLst/>
+          </a:prstGeom>
+          <a:noFill/>
+        </p:spPr>
+        <p:txBody>
+          <a:bodyPr vertOverflow="overflow" horzOverflow="overflow" vert="horz" wrap="square" lIns="91440" tIns="45720" rIns="91440" bIns="45720" numCol="1" spcCol="0" rtlCol="0" fromWordArt="0" anchor="t" anchorCtr="0" forceAA="0" upright="0" compatLnSpc="0">
+            <a:spAutoFit/>
+          </a:bodyPr>
+          <a:p>
+            <a:pPr>
+              <a:defRPr/>
+            </a:pPr>
+            <a:r>
+              <a:rPr lang="ro-RO" sz="3600" b="0" i="0" u="none" strike="noStrike" cap="none" spc="0">
+                <a:solidFill>
+                  <a:srgbClr val="404040"/>
+                </a:solidFill>
+                <a:latin typeface="Cantarell"/>
+                <a:ea typeface="Cantarell"/>
+                <a:cs typeface="Cantarell"/>
+              </a:rPr>
+              <a:t>Mediul industrial</a:t>
+            </a:r>
+            <a:endParaRPr sz="3600">
+              <a:solidFill>
+                <a:srgbClr val="404040"/>
+              </a:solidFill>
+              <a:latin typeface="Cantarell"/>
+              <a:cs typeface="Cantarell"/>
+            </a:endParaRPr>
+          </a:p>
+        </p:txBody>
+      </p:sp>
     </p:spTree>
   </p:cSld>
   <p:clrMapOvr>
@@ -5780,7 +6156,7 @@
       </p:grpSpPr>
       <p:sp>
         <p:nvSpPr>
-          <p:cNvPr id="1027134815" name="Title 1"/>
+          <p:cNvPr id="460827695" name="Title 1"/>
           <p:cNvSpPr>
             <a:spLocks noGrp="1"/>
           </p:cNvSpPr>
@@ -5802,7 +6178,7 @@
               <a:defRPr/>
             </a:pPr>
             <a:r>
-              <a:rPr lang="ro-RO">
+              <a:rPr lang="ro-RO" b="1">
                 <a:latin typeface="Cantarell"/>
                 <a:ea typeface="Cantarell"/>
                 <a:cs typeface="Cantarell"/>
@@ -5810,14 +6186,14 @@
               <a:t>Problema adresat</a:t>
             </a:r>
             <a:r>
-              <a:rPr lang="ro-RO">
+              <a:rPr lang="ro-RO" b="1">
                 <a:latin typeface="Cantarell"/>
                 <a:ea typeface="Cantarell"/>
                 <a:cs typeface="Cantarell"/>
               </a:rPr>
               <a:t>ă</a:t>
             </a:r>
-            <a:endParaRPr>
+            <a:endParaRPr b="1">
               <a:latin typeface="Cantarell"/>
               <a:cs typeface="Cantarell"/>
             </a:endParaRPr>
@@ -5826,7 +6202,7 @@
       </p:sp>
       <p:sp>
         <p:nvSpPr>
-          <p:cNvPr id="973772922" name="Content Placeholder 2"/>
+          <p:cNvPr id="1435103601" name="Content Placeholder 2"/>
           <p:cNvSpPr>
             <a:spLocks noGrp="1"/>
           </p:cNvSpPr>
@@ -5836,7 +6212,7 @@
         </p:nvSpPr>
         <p:spPr bwMode="auto">
           <a:xfrm flipH="0" flipV="0">
-            <a:off x="609598" y="3447434"/>
+            <a:off x="609597" y="2703869"/>
             <a:ext cx="5486400" cy="1149145"/>
           </a:xfrm>
         </p:spPr>
@@ -5850,9 +6226,9 @@
               <a:defRPr/>
             </a:pPr>
             <a:r>
-              <a:rPr sz="3200" b="0" i="0" u="none">
+              <a:rPr sz="3600" b="0" i="0" u="none">
                 <a:solidFill>
-                  <a:srgbClr val="000000"/>
+                  <a:srgbClr val="404040"/>
                 </a:solidFill>
                 <a:latin typeface="Cantarell"/>
                 <a:ea typeface="Cantarell"/>
@@ -5860,7 +6236,7 @@
               </a:rPr>
               <a:t>Protecția dispozitivelor împotriva intruziunilor</a:t>
             </a:r>
-            <a:endParaRPr>
+            <a:endParaRPr sz="3600">
               <a:latin typeface="Cantarell"/>
               <a:cs typeface="Cantarell"/>
             </a:endParaRPr>
@@ -5869,7 +6245,7 @@
       </p:sp>
       <p:pic>
         <p:nvPicPr>
-          <p:cNvPr id="958801543" name=""/>
+          <p:cNvPr id="1298729921" name=""/>
           <p:cNvPicPr>
             <a:picLocks noChangeAspect="1"/>
           </p:cNvPicPr>
@@ -5891,7 +6267,7 @@
       </p:pic>
       <p:pic>
         <p:nvPicPr>
-          <p:cNvPr id="125818981" name=""/>
+          <p:cNvPr id="1790726488" name=""/>
           <p:cNvPicPr>
             <a:picLocks noChangeAspect="1"/>
           </p:cNvPicPr>
@@ -5911,6 +6287,133 @@
           </a:prstGeom>
         </p:spPr>
       </p:pic>
+      <p:sp>
+        <p:nvSpPr>
+          <p:cNvPr id="1351101708" name=""/>
+          <p:cNvSpPr txBox="1"/>
+          <p:nvPr/>
+        </p:nvSpPr>
+        <p:spPr bwMode="auto">
+          <a:xfrm rot="0" flipH="0" flipV="0">
+            <a:off x="431224" y="4263721"/>
+            <a:ext cx="7277470" cy="1768199"/>
+          </a:xfrm>
+          <a:prstGeom prst="rect">
+            <a:avLst/>
+          </a:prstGeom>
+          <a:noFill/>
+        </p:spPr>
+        <p:txBody>
+          <a:bodyPr vertOverflow="overflow" horzOverflow="overflow" vert="horz" wrap="square" lIns="91440" tIns="45720" rIns="91440" bIns="45720" numCol="1" spcCol="0" rtlCol="0" fromWordArt="0" anchor="t" anchorCtr="0" forceAA="0" upright="0" compatLnSpc="0">
+            <a:spAutoFit/>
+          </a:bodyPr>
+          <a:p>
+            <a:pPr marL="319999" indent="-319999" algn="l">
+              <a:buFont typeface="Arial"/>
+              <a:buChar char="–"/>
+              <a:defRPr/>
+            </a:pPr>
+            <a:r>
+              <a:rPr lang="ro-RO" sz="2200">
+                <a:solidFill>
+                  <a:srgbClr val="404040"/>
+                </a:solidFill>
+                <a:latin typeface="Cantarell"/>
+                <a:ea typeface="Cantarell"/>
+                <a:cs typeface="Cantarell"/>
+              </a:rPr>
+              <a:t>Protocoale ce</a:t>
+            </a:r>
+            <a:r>
+              <a:rPr lang="en-US" sz="2200">
+                <a:solidFill>
+                  <a:srgbClr val="404040"/>
+                </a:solidFill>
+                <a:latin typeface="Cantarell"/>
+                <a:ea typeface="Cantarell"/>
+                <a:cs typeface="Cantarell"/>
+              </a:rPr>
+              <a:t> </a:t>
+            </a:r>
+            <a:r>
+              <a:rPr lang="ro-RO" sz="2200">
+                <a:solidFill>
+                  <a:srgbClr val="404040"/>
+                </a:solidFill>
+                <a:latin typeface="Cantarell"/>
+                <a:ea typeface="Cantarell"/>
+                <a:cs typeface="Cantarell"/>
+              </a:rPr>
+              <a:t>adresează alt set de probleme</a:t>
+            </a:r>
+            <a:endParaRPr sz="2200"/>
+          </a:p>
+          <a:p>
+            <a:pPr marL="319999" indent="-319999" algn="l">
+              <a:buFont typeface="Arial"/>
+              <a:buChar char="–"/>
+              <a:defRPr/>
+            </a:pPr>
+            <a:r>
+              <a:rPr sz="2200">
+                <a:solidFill>
+                  <a:srgbClr val="404040"/>
+                </a:solidFill>
+                <a:latin typeface="Cantarell"/>
+                <a:ea typeface="Cantarell"/>
+                <a:cs typeface="Cantarell"/>
+              </a:rPr>
+              <a:t>Dispozitive care comunică fără autentificare</a:t>
+            </a:r>
+            <a:endParaRPr sz="2200">
+              <a:solidFill>
+                <a:srgbClr val="404040"/>
+              </a:solidFill>
+              <a:latin typeface="Cantarell"/>
+              <a:ea typeface="Cantarell"/>
+              <a:cs typeface="Cantarell"/>
+            </a:endParaRPr>
+          </a:p>
+          <a:p>
+            <a:pPr marL="319999" indent="-319999" algn="l">
+              <a:buFont typeface="Arial"/>
+              <a:buChar char="–"/>
+              <a:defRPr/>
+            </a:pPr>
+            <a:r>
+              <a:rPr sz="2200">
+                <a:solidFill>
+                  <a:srgbClr val="404040"/>
+                </a:solidFill>
+                <a:latin typeface="Cantarell"/>
+                <a:ea typeface="Cantarell"/>
+                <a:cs typeface="Cantarell"/>
+              </a:rPr>
+              <a:t>Lipsă de vizibilitate asupra conexiunilor din rețea</a:t>
+            </a:r>
+            <a:endParaRPr sz="2200"/>
+          </a:p>
+          <a:p>
+            <a:pPr marL="319999" indent="-319999" algn="l">
+              <a:buFont typeface="Arial"/>
+              <a:buChar char="–"/>
+              <a:defRPr/>
+            </a:pPr>
+            <a:r>
+              <a:rPr sz="2200">
+                <a:solidFill>
+                  <a:srgbClr val="404040"/>
+                </a:solidFill>
+                <a:latin typeface="Cantarell"/>
+                <a:ea typeface="Cantarell"/>
+                <a:cs typeface="Cantarell"/>
+              </a:rPr>
+              <a:t>Detectare târzie a conexiunilor neautorizate sau anormale</a:t>
+            </a:r>
+            <a:endParaRPr sz="2200"/>
+          </a:p>
+        </p:txBody>
+      </p:sp>
     </p:spTree>
   </p:cSld>
   <p:clrMapOvr>
@@ -5946,7 +6449,7 @@
       </p:grpSpPr>
       <p:sp>
         <p:nvSpPr>
-          <p:cNvPr id="891249792" name="Title 1"/>
+          <p:cNvPr id="1704802509" name="Title 1"/>
           <p:cNvSpPr>
             <a:spLocks noGrp="1"/>
           </p:cNvSpPr>
@@ -5968,14 +6471,14 @@
               <a:defRPr/>
             </a:pPr>
             <a:r>
-              <a:rPr>
+              <a:rPr b="1">
                 <a:latin typeface="Cantarell"/>
                 <a:ea typeface="Cantarell"/>
                 <a:cs typeface="Cantarell"/>
               </a:rPr>
               <a:t>Soluția propusă</a:t>
             </a:r>
-            <a:endParaRPr>
+            <a:endParaRPr b="1">
               <a:latin typeface="Cantarell"/>
               <a:cs typeface="Cantarell"/>
             </a:endParaRPr>
@@ -5984,7 +6487,7 @@
       </p:sp>
       <p:sp>
         <p:nvSpPr>
-          <p:cNvPr id="930637720" name="Content Placeholder 2"/>
+          <p:cNvPr id="1199384197" name="Content Placeholder 2"/>
           <p:cNvSpPr>
             <a:spLocks noGrp="1"/>
           </p:cNvSpPr>
@@ -5994,8 +6497,8 @@
         </p:nvSpPr>
         <p:spPr bwMode="auto">
           <a:xfrm flipH="0" flipV="0">
-            <a:off x="609598" y="3342915"/>
-            <a:ext cx="10972800" cy="1560871"/>
+            <a:off x="609597" y="3342915"/>
+            <a:ext cx="10200369" cy="1560870"/>
           </a:xfrm>
         </p:spPr>
         <p:txBody>
@@ -6035,14 +6538,6 @@
                 <a:ea typeface="Cantarell"/>
                 <a:cs typeface="Cantarell"/>
               </a:rPr>
-              <a:t>  </a:t>
-            </a:r>
-            <a:r>
-              <a:rPr lang="ro-RO">
-                <a:latin typeface="Cantarell"/>
-                <a:ea typeface="Cantarell"/>
-                <a:cs typeface="Cantarell"/>
-              </a:rPr>
               <a:t>într</a:t>
             </a:r>
             <a:r>
@@ -6095,7 +6590,7 @@
       </p:sp>
       <p:pic>
         <p:nvPicPr>
-          <p:cNvPr id="26576437" name=""/>
+          <p:cNvPr id="1653886374" name=""/>
           <p:cNvPicPr>
             <a:picLocks noChangeAspect="1"/>
           </p:cNvPicPr>
@@ -6113,7 +6608,7 @@
         </p:blipFill>
         <p:spPr bwMode="auto">
           <a:xfrm flipH="0" flipV="0">
-            <a:off x="1836237" y="1374274"/>
+            <a:off x="1836236" y="1632370"/>
             <a:ext cx="1397030" cy="1397030"/>
           </a:xfrm>
           <a:prstGeom prst="rect">
@@ -6156,7 +6651,122 @@
       </p:grpSpPr>
       <p:sp>
         <p:nvSpPr>
-          <p:cNvPr id="570305120" name="Title 1"/>
+          <p:cNvPr id="369938998" name="Title 1"/>
+          <p:cNvSpPr>
+            <a:spLocks noGrp="1"/>
+          </p:cNvSpPr>
+          <p:nvPr>
+            <p:ph type="title"/>
+          </p:nvPr>
+        </p:nvSpPr>
+        <p:spPr bwMode="auto">
+          <a:xfrm>
+            <a:off x="609598" y="858767"/>
+            <a:ext cx="10972800" cy="1143000"/>
+          </a:xfrm>
+        </p:spPr>
+        <p:txBody>
+          <a:bodyPr/>
+          <a:lstStyle/>
+          <a:p>
+            <a:pPr>
+              <a:defRPr/>
+            </a:pPr>
+            <a:r>
+              <a:rPr lang="en-US" b="1">
+                <a:latin typeface="Cantarell"/>
+                <a:ea typeface="Cantarell"/>
+                <a:cs typeface="Cantarell"/>
+              </a:rPr>
+              <a:t>Tehnologii folosite</a:t>
+            </a:r>
+            <a:endParaRPr b="1">
+              <a:latin typeface="Cantarell"/>
+              <a:cs typeface="Cantarell"/>
+            </a:endParaRPr>
+          </a:p>
+        </p:txBody>
+      </p:sp>
+      <p:pic>
+        <p:nvPicPr>
+          <p:cNvPr id="1885346816" name=""/>
+          <p:cNvPicPr>
+            <a:picLocks noChangeAspect="1"/>
+          </p:cNvPicPr>
+          <p:nvPr/>
+        </p:nvPicPr>
+        <p:blipFill rotWithShape="1">
+          <a:blip r:embed="rId3"/>
+          <a:stretch/>
+        </p:blipFill>
+        <p:spPr bwMode="auto">
+          <a:xfrm flipH="0" flipV="0">
+            <a:off x="1214795" y="3633288"/>
+            <a:ext cx="4763194" cy="1110161"/>
+          </a:xfrm>
+          <a:prstGeom prst="rect">
+            <a:avLst/>
+          </a:prstGeom>
+        </p:spPr>
+      </p:pic>
+      <p:pic>
+        <p:nvPicPr>
+          <p:cNvPr id="92937600" name=""/>
+          <p:cNvPicPr>
+            <a:picLocks noChangeAspect="1"/>
+          </p:cNvPicPr>
+          <p:nvPr/>
+        </p:nvPicPr>
+        <p:blipFill rotWithShape="1">
+          <a:blip r:embed="rId4"/>
+          <a:stretch/>
+        </p:blipFill>
+        <p:spPr bwMode="auto">
+          <a:xfrm flipH="0" flipV="0">
+            <a:off x="6653170" y="3798023"/>
+            <a:ext cx="4222609" cy="780691"/>
+          </a:xfrm>
+          <a:prstGeom prst="rect">
+            <a:avLst/>
+          </a:prstGeom>
+        </p:spPr>
+      </p:pic>
+    </p:spTree>
+  </p:cSld>
+  <p:clrMapOvr>
+    <a:masterClrMapping/>
+  </p:clrMapOvr>
+  <mc:AlternateContent xmlns:mc="http://schemas.openxmlformats.org/markup-compatibility/2006">
+    <mc:Choice xmlns:p159="http://schemas.microsoft.com/office/powerpoint/2015/09/main" xmlns:p14="http://schemas.microsoft.com/office/powerpoint/2010/main" Requires="p159">
+      <p:transition p14:dur="500" advClick="1"/>
+    </mc:Choice>
+    <mc:Fallback>
+      <p:transition advClick="1"/>
+    </mc:Fallback>
+  </mc:AlternateContent>
+</p:sld>
+</file>
+
+<file path=ppt/slides/slide6.xml><?xml version="1.0" encoding="utf-8"?>
+<p:sld xmlns:a="http://schemas.openxmlformats.org/drawingml/2006/main" xmlns:r="http://schemas.openxmlformats.org/officeDocument/2006/relationships" xmlns:p="http://schemas.openxmlformats.org/presentationml/2006/main" xmlns:m="http://schemas.openxmlformats.org/officeDocument/2006/math" xmlns:w="http://schemas.openxmlformats.org/wordprocessingml/2006/main" xmlns:mc="http://schemas.openxmlformats.org/markup-compatibility/2006" showMasterPhAnim="0" showMasterSp="1" show="1">
+  <p:cSld name="">
+    <p:spTree>
+      <p:nvGrpSpPr>
+        <p:cNvPr id="1" name=""/>
+        <p:cNvGrpSpPr/>
+        <p:nvPr/>
+      </p:nvGrpSpPr>
+      <p:grpSpPr bwMode="auto">
+        <a:xfrm>
+          <a:off x="0" y="0"/>
+          <a:ext cx="0" cy="0"/>
+          <a:chOff x="0" y="0"/>
+          <a:chExt cx="0" cy="0"/>
+        </a:xfrm>
+      </p:grpSpPr>
+      <p:sp>
+        <p:nvSpPr>
+          <p:cNvPr id="116505746" name="Title 1"/>
           <p:cNvSpPr>
             <a:spLocks noGrp="1"/>
           </p:cNvSpPr>
@@ -6178,14 +6788,14 @@
               <a:defRPr/>
             </a:pPr>
             <a:r>
-              <a:rPr lang="ro-RO">
+              <a:rPr lang="ro-RO" b="1">
                 <a:latin typeface="Cantarell"/>
                 <a:ea typeface="Cantarell"/>
                 <a:cs typeface="Cantarell"/>
               </a:rPr>
               <a:t>Componente principale</a:t>
             </a:r>
-            <a:endParaRPr>
+            <a:endParaRPr b="1">
               <a:latin typeface="Cantarell"/>
               <a:cs typeface="Cantarell"/>
             </a:endParaRPr>
@@ -6194,7 +6804,7 @@
       </p:sp>
       <p:sp>
         <p:nvSpPr>
-          <p:cNvPr id="363601588" name="Content Placeholder 2"/>
+          <p:cNvPr id="1374202136" name="Content Placeholder 2"/>
           <p:cNvSpPr>
             <a:spLocks noGrp="1"/>
           </p:cNvSpPr>
@@ -6220,7 +6830,7 @@
               <a:defRPr/>
             </a:pPr>
             <a:r>
-              <a:rPr sz="3200" b="0" i="0" u="none">
+              <a:rPr sz="2800" b="0" i="0" u="none">
                 <a:solidFill>
                   <a:srgbClr val="404040"/>
                 </a:solidFill>
@@ -6230,7 +6840,7 @@
               </a:rPr>
               <a:t>de filtrare la nivel kernel</a:t>
             </a:r>
-            <a:endParaRPr sz="3200">
+            <a:endParaRPr sz="2800">
               <a:solidFill>
                 <a:srgbClr val="404040"/>
               </a:solidFill>
@@ -6245,7 +6855,7 @@
               <a:defRPr/>
             </a:pPr>
             <a:r>
-              <a:rPr sz="3200" b="0" i="0" u="none">
+              <a:rPr sz="2800" b="0" i="0" u="none">
                 <a:solidFill>
                   <a:srgbClr val="404040"/>
                 </a:solidFill>
@@ -6255,7 +6865,7 @@
               </a:rPr>
               <a:t>de intermediere</a:t>
             </a:r>
-            <a:endParaRPr sz="3200">
+            <a:endParaRPr sz="2800">
               <a:solidFill>
                 <a:srgbClr val="404040"/>
               </a:solidFill>
@@ -6270,7 +6880,7 @@
               <a:defRPr/>
             </a:pPr>
             <a:r>
-              <a:rPr sz="3200" b="0" i="0" u="none">
+              <a:rPr sz="2800" b="0" i="0" u="none">
                 <a:solidFill>
                   <a:srgbClr val="404040"/>
                 </a:solidFill>
@@ -6280,7 +6890,7 @@
               </a:rPr>
               <a:t>centrală</a:t>
             </a:r>
-            <a:endParaRPr sz="3200">
+            <a:endParaRPr sz="2800">
               <a:solidFill>
                 <a:srgbClr val="404040"/>
               </a:solidFill>
@@ -6295,7 +6905,7 @@
               <a:defRPr/>
             </a:pPr>
             <a:r>
-              <a:rPr sz="3200" b="0" i="0" u="none">
+              <a:rPr sz="2800" b="0" i="0" u="none">
                 <a:solidFill>
                   <a:srgbClr val="404040"/>
                 </a:solidFill>
@@ -6305,7 +6915,7 @@
               </a:rPr>
               <a:t>de administrare</a:t>
             </a:r>
-            <a:endParaRPr sz="3200">
+            <a:endParaRPr sz="2800">
               <a:solidFill>
                 <a:srgbClr val="404040"/>
               </a:solidFill>
@@ -6317,7 +6927,7 @@
       </p:sp>
       <p:pic>
         <p:nvPicPr>
-          <p:cNvPr id="1607747448" name=""/>
+          <p:cNvPr id="1864314322" name=""/>
           <p:cNvPicPr>
             <a:picLocks noChangeAspect="1"/>
           </p:cNvPicPr>
@@ -6345,7 +6955,7 @@
       </p:pic>
       <p:pic>
         <p:nvPicPr>
-          <p:cNvPr id="1829034852" name=""/>
+          <p:cNvPr id="18806352" name=""/>
           <p:cNvPicPr>
             <a:picLocks noChangeAspect="1"/>
           </p:cNvPicPr>
@@ -6373,7 +6983,7 @@
       </p:pic>
       <p:pic>
         <p:nvPicPr>
-          <p:cNvPr id="2053697879" name=""/>
+          <p:cNvPr id="170647617" name=""/>
           <p:cNvPicPr>
             <a:picLocks noChangeAspect="1"/>
           </p:cNvPicPr>
@@ -6415,7 +7025,7 @@
 </p:sld>
 </file>
 
-<file path=ppt/slides/slide6.xml><?xml version="1.0" encoding="utf-8"?>
+<file path=ppt/slides/slide7.xml><?xml version="1.0" encoding="utf-8"?>
 <p:sld xmlns:a="http://schemas.openxmlformats.org/drawingml/2006/main" xmlns:r="http://schemas.openxmlformats.org/officeDocument/2006/relationships" xmlns:p="http://schemas.openxmlformats.org/presentationml/2006/main" xmlns:m="http://schemas.openxmlformats.org/officeDocument/2006/math" xmlns:w="http://schemas.openxmlformats.org/wordprocessingml/2006/main" xmlns:mc="http://schemas.openxmlformats.org/markup-compatibility/2006" showMasterPhAnim="0" showMasterSp="1" show="1">
   <p:cSld name="">
     <p:spTree>
@@ -6434,7 +7044,7 @@
       </p:grpSpPr>
       <p:sp>
         <p:nvSpPr>
-          <p:cNvPr id="1432793860" name="Title 1"/>
+          <p:cNvPr id="1925878753" name="Title 1"/>
           <p:cNvSpPr>
             <a:spLocks noGrp="1"/>
           </p:cNvSpPr>
@@ -6456,16 +7066,16 @@
               <a:defRPr/>
             </a:pPr>
             <a:r>
-              <a:rPr/>
+              <a:rPr b="1"/>
               <a:t>Cum funcționează ?</a:t>
             </a:r>
-            <a:endParaRPr/>
-          </a:p>
-        </p:txBody>
-      </p:sp>
-      <p:sp>
-        <p:nvSpPr>
-          <p:cNvPr id="490277999" name="Content Placeholder 2"/>
+            <a:endParaRPr b="1"/>
+          </a:p>
+        </p:txBody>
+      </p:sp>
+      <p:sp>
+        <p:nvSpPr>
+          <p:cNvPr id="1433488262" name="Content Placeholder 2"/>
           <p:cNvSpPr>
             <a:spLocks noGrp="1"/>
           </p:cNvSpPr>
@@ -6481,7 +7091,7 @@
         </p:spPr>
         <p:txBody>
           <a:bodyPr vertOverflow="overflow" horzOverflow="overflow" vert="horz" wrap="square" lIns="91440" tIns="45720" rIns="91440" bIns="45720" numCol="1" spcCol="0" rtlCol="0" fromWordArt="0" anchor="t" anchorCtr="0" forceAA="0" upright="0" compatLnSpc="0">
-            <a:normAutofit fontScale="40000" lnSpcReduction="12000"/>
+            <a:normAutofit/>
           </a:bodyPr>
           <a:lstStyle/>
           <a:p>
@@ -6489,44 +7099,68 @@
               <a:defRPr/>
             </a:pPr>
             <a:r>
-              <a:rPr sz="8000"/>
+              <a:rPr sz="2800">
+                <a:latin typeface="Cantarell"/>
+                <a:ea typeface="Cantarell"/>
+                <a:cs typeface="Cantarell"/>
+              </a:rPr>
               <a:t>Aplicarea regulilor alese pe echipament</a:t>
             </a:r>
-            <a:endParaRPr sz="8000"/>
-          </a:p>
-          <a:p>
-            <a:pPr>
-              <a:defRPr/>
-            </a:pPr>
-            <a:r>
-              <a:rPr sz="8000">
+            <a:endParaRPr sz="2800">
+              <a:latin typeface="Cantarell"/>
+              <a:cs typeface="Cantarell"/>
+            </a:endParaRPr>
+          </a:p>
+          <a:p>
+            <a:pPr>
+              <a:defRPr/>
+            </a:pPr>
+            <a:r>
+              <a:rPr sz="2800">
                 <a:solidFill>
                   <a:srgbClr val="404040"/>
                 </a:solidFill>
+                <a:latin typeface="Cantarell"/>
+                <a:ea typeface="Cantarell"/>
+                <a:cs typeface="Cantarell"/>
               </a:rPr>
               <a:t>Extragerea </a:t>
             </a:r>
             <a:r>
-              <a:rPr sz="8000"/>
+              <a:rPr sz="2800">
+                <a:latin typeface="Cantarell"/>
+                <a:ea typeface="Cantarell"/>
+                <a:cs typeface="Cantarell"/>
+              </a:rPr>
               <a:t>și vizualizarea conexiunilor în mod grafic</a:t>
             </a:r>
-            <a:endParaRPr sz="8000"/>
-          </a:p>
-          <a:p>
-            <a:pPr>
-              <a:defRPr/>
-            </a:pPr>
-            <a:r>
-              <a:rPr sz="8000"/>
+            <a:endParaRPr sz="2800">
+              <a:latin typeface="Cantarell"/>
+              <a:cs typeface="Cantarell"/>
+            </a:endParaRPr>
+          </a:p>
+          <a:p>
+            <a:pPr>
+              <a:defRPr/>
+            </a:pPr>
+            <a:r>
+              <a:rPr sz="2800">
+                <a:latin typeface="Cantarell"/>
+                <a:ea typeface="Cantarell"/>
+                <a:cs typeface="Cantarell"/>
+              </a:rPr>
               <a:t>Modificarea acestora în timp real</a:t>
             </a:r>
-            <a:endParaRPr sz="8000"/>
+            <a:endParaRPr sz="2800">
+              <a:latin typeface="Cantarell"/>
+              <a:cs typeface="Cantarell"/>
+            </a:endParaRPr>
           </a:p>
         </p:txBody>
       </p:sp>
       <p:pic>
         <p:nvPicPr>
-          <p:cNvPr id="1923451626" name=""/>
+          <p:cNvPr id="1837265332" name=""/>
           <p:cNvPicPr>
             <a:picLocks noChangeAspect="1"/>
           </p:cNvPicPr>
@@ -6554,7 +7188,7 @@
       </p:pic>
       <p:pic>
         <p:nvPicPr>
-          <p:cNvPr id="1776895746" name=""/>
+          <p:cNvPr id="769693195" name=""/>
           <p:cNvPicPr>
             <a:picLocks noChangeAspect="1"/>
           </p:cNvPicPr>
@@ -6596,70 +7230,6 @@
 </p:sld>
 </file>
 
-<file path=ppt/slides/slide7.xml><?xml version="1.0" encoding="utf-8"?>
-<p:sld xmlns:a="http://schemas.openxmlformats.org/drawingml/2006/main" xmlns:r="http://schemas.openxmlformats.org/officeDocument/2006/relationships" xmlns:p="http://schemas.openxmlformats.org/presentationml/2006/main" xmlns:m="http://schemas.openxmlformats.org/officeDocument/2006/math" xmlns:w="http://schemas.openxmlformats.org/wordprocessingml/2006/main" xmlns:mc="http://schemas.openxmlformats.org/markup-compatibility/2006" showMasterPhAnim="0" showMasterSp="1" show="1">
-  <p:cSld name="">
-    <p:spTree>
-      <p:nvGrpSpPr>
-        <p:cNvPr id="1" name=""/>
-        <p:cNvGrpSpPr/>
-        <p:nvPr/>
-      </p:nvGrpSpPr>
-      <p:grpSpPr bwMode="auto">
-        <a:xfrm>
-          <a:off x="0" y="0"/>
-          <a:ext cx="0" cy="0"/>
-          <a:chOff x="0" y="0"/>
-          <a:chExt cx="0" cy="0"/>
-        </a:xfrm>
-      </p:grpSpPr>
-      <p:sp>
-        <p:nvSpPr>
-          <p:cNvPr id="633431238" name="Title 1"/>
-          <p:cNvSpPr>
-            <a:spLocks noGrp="1"/>
-          </p:cNvSpPr>
-          <p:nvPr>
-            <p:ph type="title"/>
-          </p:nvPr>
-        </p:nvSpPr>
-        <p:spPr bwMode="auto">
-          <a:xfrm>
-            <a:off x="609599" y="1978024"/>
-            <a:ext cx="10972800" cy="1143000"/>
-          </a:xfrm>
-        </p:spPr>
-        <p:txBody>
-          <a:bodyPr/>
-          <a:lstStyle/>
-          <a:p>
-            <a:pPr algn="ctr">
-              <a:defRPr/>
-            </a:pPr>
-            <a:r>
-              <a:rPr/>
-              <a:t>DEMO</a:t>
-            </a:r>
-            <a:endParaRPr/>
-          </a:p>
-        </p:txBody>
-      </p:sp>
-    </p:spTree>
-  </p:cSld>
-  <p:clrMapOvr>
-    <a:masterClrMapping/>
-  </p:clrMapOvr>
-  <mc:AlternateContent xmlns:mc="http://schemas.openxmlformats.org/markup-compatibility/2006">
-    <mc:Choice xmlns:p159="http://schemas.microsoft.com/office/powerpoint/2015/09/main" xmlns:p14="http://schemas.microsoft.com/office/powerpoint/2010/main" Requires="p159">
-      <p:transition p14:dur="500" advClick="1"/>
-    </mc:Choice>
-    <mc:Fallback>
-      <p:transition advClick="1"/>
-    </mc:Fallback>
-  </mc:AlternateContent>
-</p:sld>
-</file>
-
 <file path=ppt/slides/slide8.xml><?xml version="1.0" encoding="utf-8"?>
 <p:sld xmlns:a="http://schemas.openxmlformats.org/drawingml/2006/main" xmlns:r="http://schemas.openxmlformats.org/officeDocument/2006/relationships" xmlns:p="http://schemas.openxmlformats.org/presentationml/2006/main" xmlns:m="http://schemas.openxmlformats.org/officeDocument/2006/math" xmlns:w="http://schemas.openxmlformats.org/wordprocessingml/2006/main" xmlns:mc="http://schemas.openxmlformats.org/markup-compatibility/2006" showMasterPhAnim="0" showMasterSp="1" show="1">
   <p:cSld name="">
@@ -6679,7 +7249,102 @@
       </p:grpSpPr>
       <p:sp>
         <p:nvSpPr>
-          <p:cNvPr id="1731847172" name="Title 1"/>
+          <p:cNvPr id="96330776" name="Title 1"/>
+          <p:cNvSpPr>
+            <a:spLocks noGrp="1"/>
+          </p:cNvSpPr>
+          <p:nvPr>
+            <p:ph type="title"/>
+          </p:nvPr>
+        </p:nvSpPr>
+        <p:spPr bwMode="auto">
+          <a:xfrm flipH="0" flipV="0">
+            <a:off x="-7257" y="1197879"/>
+            <a:ext cx="4840061" cy="1206047"/>
+          </a:xfrm>
+        </p:spPr>
+        <p:txBody>
+          <a:bodyPr/>
+          <a:lstStyle/>
+          <a:p>
+            <a:pPr algn="ctr">
+              <a:defRPr/>
+            </a:pPr>
+            <a:r>
+              <a:rPr/>
+              <a:t>DEMO</a:t>
+            </a:r>
+            <a:endParaRPr/>
+          </a:p>
+        </p:txBody>
+      </p:sp>
+      <p:pic>
+        <p:nvPicPr>
+          <p:cNvPr id="929907452" name="">
+            <a:hlinkClick r:id="" action="ppaction://media"/>
+          </p:cNvPr>
+          <p:cNvPicPr>
+            <a:picLocks noChangeAspect="1"/>
+          </p:cNvPicPr>
+          <p:nvPr>
+            <a:videoFile r:link="rId5"/>
+            <p:extLst>
+              <p:ext uri="{DAA4B4D4-6D71-4841-9C94-3DE7FCFB9230}">
+                <p14:media xmlns:p14="http://schemas.microsoft.com/office/powerpoint/2010/main" r:embed="rId4"/>
+              </p:ext>
+            </p:extLst>
+          </p:nvPr>
+        </p:nvPicPr>
+        <p:blipFill rotWithShape="1">
+          <a:blip r:embed="rId3"/>
+          <a:stretch/>
+        </p:blipFill>
+        <p:spPr bwMode="auto">
+          <a:xfrm flipH="0" flipV="0">
+            <a:off x="4832803" y="43089"/>
+            <a:ext cx="6779553" cy="6779553"/>
+          </a:xfrm>
+          <a:prstGeom prst="rect">
+            <a:avLst/>
+          </a:prstGeom>
+        </p:spPr>
+      </p:pic>
+    </p:spTree>
+  </p:cSld>
+  <p:clrMapOvr>
+    <a:masterClrMapping/>
+  </p:clrMapOvr>
+  <mc:AlternateContent xmlns:mc="http://schemas.openxmlformats.org/markup-compatibility/2006">
+    <mc:Choice xmlns:p159="http://schemas.microsoft.com/office/powerpoint/2015/09/main" xmlns:p14="http://schemas.microsoft.com/office/powerpoint/2010/main" Requires="p159">
+      <p:transition p14:dur="500" advClick="1"/>
+    </mc:Choice>
+    <mc:Fallback>
+      <p:transition advClick="1"/>
+    </mc:Fallback>
+  </mc:AlternateContent>
+</p:sld>
+</file>
+
+<file path=ppt/slides/slide9.xml><?xml version="1.0" encoding="utf-8"?>
+<p:sld xmlns:a="http://schemas.openxmlformats.org/drawingml/2006/main" xmlns:r="http://schemas.openxmlformats.org/officeDocument/2006/relationships" xmlns:p="http://schemas.openxmlformats.org/presentationml/2006/main" xmlns:m="http://schemas.openxmlformats.org/officeDocument/2006/math" xmlns:w="http://schemas.openxmlformats.org/wordprocessingml/2006/main" xmlns:mc="http://schemas.openxmlformats.org/markup-compatibility/2006" showMasterPhAnim="0" showMasterSp="1" show="1">
+  <p:cSld name="">
+    <p:spTree>
+      <p:nvGrpSpPr>
+        <p:cNvPr id="1" name=""/>
+        <p:cNvGrpSpPr/>
+        <p:nvPr/>
+      </p:nvGrpSpPr>
+      <p:grpSpPr bwMode="auto">
+        <a:xfrm>
+          <a:off x="0" y="0"/>
+          <a:ext cx="0" cy="0"/>
+          <a:chOff x="0" y="0"/>
+          <a:chExt cx="0" cy="0"/>
+        </a:xfrm>
+      </p:grpSpPr>
+      <p:sp>
+        <p:nvSpPr>
+          <p:cNvPr id="800097742" name="Title 1"/>
           <p:cNvSpPr>
             <a:spLocks noGrp="1"/>
           </p:cNvSpPr>
